--- a/Projects/OpenCanpas01/UE_アクションゲーム制作体験.pptx
+++ b/Projects/OpenCanpas01/UE_アクションゲーム制作体験.pptx
@@ -15,17 +15,18 @@
     <p:sldId id="264" r:id="rId9"/>
     <p:sldId id="265" r:id="rId10"/>
     <p:sldId id="266" r:id="rId11"/>
-    <p:sldId id="267" r:id="rId12"/>
-    <p:sldId id="268" r:id="rId13"/>
-    <p:sldId id="269" r:id="rId14"/>
-    <p:sldId id="270" r:id="rId15"/>
-    <p:sldId id="271" r:id="rId16"/>
-    <p:sldId id="272" r:id="rId17"/>
-    <p:sldId id="273" r:id="rId18"/>
-    <p:sldId id="274" r:id="rId19"/>
-    <p:sldId id="275" r:id="rId20"/>
-    <p:sldId id="276" r:id="rId21"/>
-    <p:sldId id="277" r:id="rId22"/>
+    <p:sldId id="278" r:id="rId12"/>
+    <p:sldId id="267" r:id="rId13"/>
+    <p:sldId id="268" r:id="rId14"/>
+    <p:sldId id="269" r:id="rId15"/>
+    <p:sldId id="270" r:id="rId16"/>
+    <p:sldId id="271" r:id="rId17"/>
+    <p:sldId id="272" r:id="rId18"/>
+    <p:sldId id="273" r:id="rId19"/>
+    <p:sldId id="274" r:id="rId20"/>
+    <p:sldId id="275" r:id="rId21"/>
+    <p:sldId id="276" r:id="rId22"/>
+    <p:sldId id="277" r:id="rId23"/>
   </p:sldIdLst>
   <p:sldSz cx="12192000" cy="6858000"/>
   <p:notesSz cx="6858000" cy="9144000"/>
@@ -3906,6 +3907,36 @@
           </a:p>
         </p:txBody>
       </p:sp>
+      <p:pic>
+        <p:nvPicPr>
+          <p:cNvPr id="8" name="図 7">
+            <a:extLst>
+              <a:ext uri="{FF2B5EF4-FFF2-40B4-BE49-F238E27FC236}">
+                <a16:creationId xmlns:a16="http://schemas.microsoft.com/office/drawing/2014/main" id="{500D2806-7E71-4AF7-A5D2-758D8D1524CD}"/>
+              </a:ext>
+            </a:extLst>
+          </p:cNvPr>
+          <p:cNvPicPr>
+            <a:picLocks noChangeAspect="1"/>
+          </p:cNvPicPr>
+          <p:nvPr/>
+        </p:nvPicPr>
+        <p:blipFill>
+          <a:blip r:embed="rId2"/>
+          <a:stretch>
+            <a:fillRect/>
+          </a:stretch>
+        </p:blipFill>
+        <p:spPr>
+          <a:xfrm>
+            <a:off x="567541" y="2187125"/>
+            <a:ext cx="6800237" cy="3265407"/>
+          </a:xfrm>
+          <a:prstGeom prst="rect">
+            <a:avLst/>
+          </a:prstGeom>
+        </p:spPr>
+      </p:pic>
     </p:spTree>
     <p:extLst>
       <p:ext uri="{BB962C8B-B14F-4D97-AF65-F5344CB8AC3E}">
@@ -3987,7 +4018,7 @@
         <p:spPr>
           <a:xfrm>
             <a:off x="567542" y="1216429"/>
-            <a:ext cx="9417963" cy="830997"/>
+            <a:ext cx="9761005" cy="461665"/>
           </a:xfrm>
           <a:prstGeom prst="rect">
             <a:avLst/>
@@ -4001,12 +4032,16 @@
           <a:lstStyle/>
           <a:p>
             <a:r>
-              <a:rPr lang="en-US" altLang="ja-JP" sz="2400" dirty="0"/>
-              <a:t>Unreal Engine</a:t>
+              <a:rPr lang="en-US" altLang="ja-JP" sz="2400" b="1" dirty="0">
+                <a:solidFill>
+                  <a:srgbClr val="7030A0"/>
+                </a:solidFill>
+              </a:rPr>
+              <a:t>Visual Studio</a:t>
             </a:r>
             <a:r>
               <a:rPr lang="ja-JP" altLang="en-US" sz="2400" dirty="0"/>
-              <a:t>では</a:t>
+              <a:t>に画面を切り替えて、</a:t>
             </a:r>
             <a:r>
               <a:rPr lang="en-US" altLang="ja-JP" sz="2400" b="1" dirty="0">
@@ -4014,123 +4049,104 @@
                   <a:srgbClr val="FF0000"/>
                 </a:solidFill>
               </a:rPr>
-              <a:t>C++</a:t>
+              <a:t>ItemBase.cpp</a:t>
             </a:r>
             <a:r>
               <a:rPr lang="ja-JP" altLang="en-US" sz="2400" dirty="0"/>
-              <a:t>という</a:t>
-            </a:r>
-            <a:r>
-              <a:rPr lang="ja-JP" altLang="en-US" sz="2400" b="1" dirty="0">
-                <a:solidFill>
-                  <a:srgbClr val="FF0000"/>
-                </a:solidFill>
-              </a:rPr>
-              <a:t>プログラム言語</a:t>
-            </a:r>
-            <a:r>
-              <a:rPr lang="ja-JP" altLang="en-US" sz="2400" dirty="0"/>
-              <a:t>も使います。</a:t>
+              <a:t>を開きましょう。</a:t>
             </a:r>
             <a:endParaRPr lang="en-US" altLang="ja-JP" sz="2400" dirty="0"/>
           </a:p>
-          <a:p>
-            <a:r>
-              <a:rPr lang="ja-JP" altLang="en-US" sz="2400" dirty="0"/>
-              <a:t>こちらで、</a:t>
-            </a:r>
-            <a:r>
-              <a:rPr lang="ja-JP" altLang="en-US" sz="2400" b="1" dirty="0">
-                <a:solidFill>
-                  <a:srgbClr val="FF0000"/>
-                </a:solidFill>
-              </a:rPr>
-              <a:t>コインと重なった処理のプログラム</a:t>
-            </a:r>
-            <a:r>
-              <a:rPr lang="ja-JP" altLang="en-US" sz="2400" dirty="0"/>
-              <a:t>を書いていきます。</a:t>
-            </a:r>
-            <a:endParaRPr lang="en-US" altLang="ja-JP" sz="2400" dirty="0"/>
-          </a:p>
-        </p:txBody>
-      </p:sp>
-      <p:sp>
-        <p:nvSpPr>
-          <p:cNvPr id="5" name="テキスト ボックス 4">
-            <a:extLst>
-              <a:ext uri="{FF2B5EF4-FFF2-40B4-BE49-F238E27FC236}">
-                <a16:creationId xmlns:a16="http://schemas.microsoft.com/office/drawing/2014/main" id="{A6EAFAF2-BDAD-46C4-BE93-C91CB15D7D27}"/>
-              </a:ext>
-            </a:extLst>
-          </p:cNvPr>
-          <p:cNvSpPr txBox="1"/>
-          <p:nvPr/>
-        </p:nvSpPr>
-        <p:spPr>
-          <a:xfrm>
-            <a:off x="567542" y="5788429"/>
-            <a:ext cx="5198859" cy="461665"/>
+        </p:txBody>
+      </p:sp>
+      <p:pic>
+        <p:nvPicPr>
+          <p:cNvPr id="3" name="図 2">
+            <a:extLst>
+              <a:ext uri="{FF2B5EF4-FFF2-40B4-BE49-F238E27FC236}">
+                <a16:creationId xmlns:a16="http://schemas.microsoft.com/office/drawing/2014/main" id="{1BAA9D54-DDE1-446B-B3DC-EDDF5924A26E}"/>
+              </a:ext>
+            </a:extLst>
+          </p:cNvPr>
+          <p:cNvPicPr>
+            <a:picLocks noChangeAspect="1"/>
+          </p:cNvPicPr>
+          <p:nvPr/>
+        </p:nvPicPr>
+        <p:blipFill>
+          <a:blip r:embed="rId2"/>
+          <a:stretch>
+            <a:fillRect/>
+          </a:stretch>
+        </p:blipFill>
+        <p:spPr>
+          <a:xfrm>
+            <a:off x="567542" y="1817794"/>
+            <a:ext cx="2160861" cy="4811606"/>
           </a:xfrm>
           <a:prstGeom prst="rect">
             <a:avLst/>
           </a:prstGeom>
-          <a:noFill/>
-        </p:spPr>
-        <p:txBody>
-          <a:bodyPr wrap="none" rtlCol="0">
-            <a:spAutoFit/>
-          </a:bodyPr>
-          <a:lstStyle/>
-          <a:p>
-            <a:r>
-              <a:rPr lang="ja-JP" altLang="en-US" sz="2400" dirty="0"/>
-              <a:t>書いたら</a:t>
-            </a:r>
-            <a:r>
-              <a:rPr lang="en-US" altLang="ja-JP" sz="2400" b="1" dirty="0">
-                <a:solidFill>
-                  <a:srgbClr val="FF0000"/>
-                </a:solidFill>
-              </a:rPr>
-              <a:t>Ctrl</a:t>
-            </a:r>
-            <a:r>
-              <a:rPr lang="ja-JP" altLang="en-US" sz="2400" b="1" dirty="0">
-                <a:solidFill>
-                  <a:srgbClr val="FF0000"/>
-                </a:solidFill>
-              </a:rPr>
-              <a:t>＋</a:t>
-            </a:r>
-            <a:r>
-              <a:rPr lang="en-US" altLang="ja-JP" sz="2400" b="1" dirty="0">
-                <a:solidFill>
-                  <a:srgbClr val="FF0000"/>
-                </a:solidFill>
-              </a:rPr>
-              <a:t>S</a:t>
-            </a:r>
-            <a:r>
-              <a:rPr lang="ja-JP" altLang="en-US" sz="2400" b="1" dirty="0">
-                <a:solidFill>
-                  <a:srgbClr val="FF0000"/>
-                </a:solidFill>
-              </a:rPr>
-              <a:t>で保存</a:t>
-            </a:r>
-            <a:r>
-              <a:rPr lang="ja-JP" altLang="en-US" sz="2400" dirty="0"/>
-              <a:t>しましょう。</a:t>
-            </a:r>
-            <a:endParaRPr lang="en-US" altLang="ja-JP" sz="2400" dirty="0"/>
+        </p:spPr>
+      </p:pic>
+      <p:sp>
+        <p:nvSpPr>
+          <p:cNvPr id="10" name="矢印: 右 9">
+            <a:extLst>
+              <a:ext uri="{FF2B5EF4-FFF2-40B4-BE49-F238E27FC236}">
+                <a16:creationId xmlns:a16="http://schemas.microsoft.com/office/drawing/2014/main" id="{B4FF81B1-8326-47F2-A6E6-8CB013F41F7E}"/>
+              </a:ext>
+            </a:extLst>
+          </p:cNvPr>
+          <p:cNvSpPr/>
+          <p:nvPr/>
+        </p:nvSpPr>
+        <p:spPr>
+          <a:xfrm rot="18234661">
+            <a:off x="1259558" y="5024858"/>
+            <a:ext cx="776827" cy="524934"/>
+          </a:xfrm>
+          <a:prstGeom prst="rightArrow">
+            <a:avLst/>
+          </a:prstGeom>
+          <a:solidFill>
+            <a:srgbClr val="FF0000"/>
+          </a:solidFill>
+          <a:ln>
+            <a:solidFill>
+              <a:schemeClr val="tx1"/>
+            </a:solidFill>
+          </a:ln>
+        </p:spPr>
+        <p:style>
+          <a:lnRef idx="2">
+            <a:schemeClr val="accent1">
+              <a:shade val="50000"/>
+            </a:schemeClr>
+          </a:lnRef>
+          <a:fillRef idx="1">
+            <a:schemeClr val="accent1"/>
+          </a:fillRef>
+          <a:effectRef idx="0">
+            <a:schemeClr val="accent1"/>
+          </a:effectRef>
+          <a:fontRef idx="minor">
+            <a:schemeClr val="lt1"/>
+          </a:fontRef>
+        </p:style>
+        <p:txBody>
+          <a:bodyPr rtlCol="0" anchor="ctr"/>
+          <a:lstStyle/>
+          <a:p>
+            <a:pPr algn="ctr"/>
+            <a:endParaRPr kumimoji="1" lang="ja-JP" altLang="en-US"/>
           </a:p>
         </p:txBody>
       </p:sp>
     </p:spTree>
     <p:extLst>
       <p:ext uri="{BB962C8B-B14F-4D97-AF65-F5344CB8AC3E}">
-        <p14:creationId xmlns:p14="http://schemas.microsoft.com/office/powerpoint/2010/main" val="1312901314"/>
+        <p14:creationId xmlns:p14="http://schemas.microsoft.com/office/powerpoint/2010/main" val="2925135928"/>
       </p:ext>
     </p:extLst>
   </p:cSld>
@@ -4222,6 +4238,14 @@
           <a:lstStyle/>
           <a:p>
             <a:r>
+              <a:rPr lang="en-US" altLang="ja-JP" sz="2400" dirty="0"/>
+              <a:t>Unreal Engine</a:t>
+            </a:r>
+            <a:r>
+              <a:rPr lang="ja-JP" altLang="en-US" sz="2400" dirty="0"/>
+              <a:t>では</a:t>
+            </a:r>
+            <a:r>
               <a:rPr lang="en-US" altLang="ja-JP" sz="2400" b="1" dirty="0">
                 <a:solidFill>
                   <a:srgbClr val="FF0000"/>
@@ -4230,12 +4254,75 @@
               <a:t>C++</a:t>
             </a:r>
             <a:r>
+              <a:rPr lang="ja-JP" altLang="en-US" sz="2400" dirty="0"/>
+              <a:t>という</a:t>
+            </a:r>
+            <a:r>
               <a:rPr lang="ja-JP" altLang="en-US" sz="2400" b="1" dirty="0">
                 <a:solidFill>
                   <a:srgbClr val="FF0000"/>
                 </a:solidFill>
               </a:rPr>
-              <a:t>を書いたら</a:t>
+              <a:t>プログラム言語</a:t>
+            </a:r>
+            <a:r>
+              <a:rPr lang="ja-JP" altLang="en-US" sz="2400" dirty="0"/>
+              <a:t>も使います。</a:t>
+            </a:r>
+            <a:endParaRPr lang="en-US" altLang="ja-JP" sz="2400" dirty="0"/>
+          </a:p>
+          <a:p>
+            <a:r>
+              <a:rPr lang="ja-JP" altLang="en-US" sz="2400" dirty="0"/>
+              <a:t>こちらで、</a:t>
+            </a:r>
+            <a:r>
+              <a:rPr lang="ja-JP" altLang="en-US" sz="2400" b="1" dirty="0">
+                <a:solidFill>
+                  <a:srgbClr val="FF0000"/>
+                </a:solidFill>
+              </a:rPr>
+              <a:t>コインと重なった時のプログラム</a:t>
+            </a:r>
+            <a:r>
+              <a:rPr lang="ja-JP" altLang="en-US" sz="2400" dirty="0"/>
+              <a:t>を書いていきます。</a:t>
+            </a:r>
+            <a:endParaRPr lang="en-US" altLang="ja-JP" sz="2400" dirty="0"/>
+          </a:p>
+        </p:txBody>
+      </p:sp>
+      <p:sp>
+        <p:nvSpPr>
+          <p:cNvPr id="5" name="テキスト ボックス 4">
+            <a:extLst>
+              <a:ext uri="{FF2B5EF4-FFF2-40B4-BE49-F238E27FC236}">
+                <a16:creationId xmlns:a16="http://schemas.microsoft.com/office/drawing/2014/main" id="{A6EAFAF2-BDAD-46C4-BE93-C91CB15D7D27}"/>
+              </a:ext>
+            </a:extLst>
+          </p:cNvPr>
+          <p:cNvSpPr txBox="1"/>
+          <p:nvPr/>
+        </p:nvSpPr>
+        <p:spPr>
+          <a:xfrm>
+            <a:off x="567542" y="5788429"/>
+            <a:ext cx="5198859" cy="461665"/>
+          </a:xfrm>
+          <a:prstGeom prst="rect">
+            <a:avLst/>
+          </a:prstGeom>
+          <a:noFill/>
+        </p:spPr>
+        <p:txBody>
+          <a:bodyPr wrap="none" rtlCol="0">
+            <a:spAutoFit/>
+          </a:bodyPr>
+          <a:lstStyle/>
+          <a:p>
+            <a:r>
+              <a:rPr lang="ja-JP" altLang="en-US" sz="2400" dirty="0"/>
+              <a:t>書いたら</a:t>
             </a:r>
             <a:r>
               <a:rPr lang="en-US" altLang="ja-JP" sz="2400" b="1" dirty="0">
@@ -4243,7 +4330,7 @@
                   <a:srgbClr val="FF0000"/>
                 </a:solidFill>
               </a:rPr>
-              <a:t>Unreal Engine</a:t>
+              <a:t>Ctrl</a:t>
             </a:r>
             <a:r>
               <a:rPr lang="ja-JP" altLang="en-US" sz="2400" b="1" dirty="0">
@@ -4251,18 +4338,15 @@
                   <a:srgbClr val="FF0000"/>
                 </a:solidFill>
               </a:rPr>
-              <a:t>側に教えなければいけません。</a:t>
-            </a:r>
-            <a:endParaRPr lang="en-US" altLang="ja-JP" sz="2400" b="1" dirty="0">
-              <a:solidFill>
-                <a:srgbClr val="FF0000"/>
-              </a:solidFill>
-            </a:endParaRPr>
-          </a:p>
-          <a:p>
-            <a:r>
-              <a:rPr lang="ja-JP" altLang="en-US" sz="2400" dirty="0"/>
-              <a:t>右下に小さな</a:t>
+              <a:t>＋</a:t>
+            </a:r>
+            <a:r>
+              <a:rPr lang="en-US" altLang="ja-JP" sz="2400" b="1" dirty="0">
+                <a:solidFill>
+                  <a:srgbClr val="FF0000"/>
+                </a:solidFill>
+              </a:rPr>
+              <a:t>S</a:t>
             </a:r>
             <a:r>
               <a:rPr lang="ja-JP" altLang="en-US" sz="2400" b="1" dirty="0">
@@ -4270,68 +4354,102 @@
                   <a:srgbClr val="FF0000"/>
                 </a:solidFill>
               </a:rPr>
-              <a:t>コンパイルボタン</a:t>
+              <a:t>で保存</a:t>
             </a:r>
             <a:r>
               <a:rPr lang="ja-JP" altLang="en-US" sz="2400" dirty="0"/>
-              <a:t>があるので、押してみましょう。</a:t>
+              <a:t>しましょう。</a:t>
             </a:r>
             <a:endParaRPr lang="en-US" altLang="ja-JP" sz="2400" dirty="0"/>
           </a:p>
         </p:txBody>
       </p:sp>
-      <p:sp>
-        <p:nvSpPr>
-          <p:cNvPr id="5" name="テキスト ボックス 4">
-            <a:extLst>
-              <a:ext uri="{FF2B5EF4-FFF2-40B4-BE49-F238E27FC236}">
-                <a16:creationId xmlns:a16="http://schemas.microsoft.com/office/drawing/2014/main" id="{A6EAFAF2-BDAD-46C4-BE93-C91CB15D7D27}"/>
-              </a:ext>
-            </a:extLst>
-          </p:cNvPr>
-          <p:cNvSpPr txBox="1"/>
-          <p:nvPr/>
-        </p:nvSpPr>
-        <p:spPr>
-          <a:xfrm>
-            <a:off x="567542" y="5788429"/>
-            <a:ext cx="6647974" cy="461665"/>
+      <p:pic>
+        <p:nvPicPr>
+          <p:cNvPr id="9" name="図 8">
+            <a:extLst>
+              <a:ext uri="{FF2B5EF4-FFF2-40B4-BE49-F238E27FC236}">
+                <a16:creationId xmlns:a16="http://schemas.microsoft.com/office/drawing/2014/main" id="{699FAD0D-C5D3-4A77-AEEE-0287E9C58E3C}"/>
+              </a:ext>
+            </a:extLst>
+          </p:cNvPr>
+          <p:cNvPicPr>
+            <a:picLocks noChangeAspect="1"/>
+          </p:cNvPicPr>
+          <p:nvPr/>
+        </p:nvPicPr>
+        <p:blipFill>
+          <a:blip r:embed="rId2"/>
+          <a:stretch>
+            <a:fillRect/>
+          </a:stretch>
+        </p:blipFill>
+        <p:spPr>
+          <a:xfrm>
+            <a:off x="677772" y="2041208"/>
+            <a:ext cx="8889725" cy="3753439"/>
           </a:xfrm>
           <a:prstGeom prst="rect">
             <a:avLst/>
           </a:prstGeom>
+        </p:spPr>
+      </p:pic>
+      <p:sp>
+        <p:nvSpPr>
+          <p:cNvPr id="10" name="正方形/長方形 9">
+            <a:extLst>
+              <a:ext uri="{FF2B5EF4-FFF2-40B4-BE49-F238E27FC236}">
+                <a16:creationId xmlns:a16="http://schemas.microsoft.com/office/drawing/2014/main" id="{D33D4275-CBF3-416A-90D5-088B1FFF34C8}"/>
+              </a:ext>
+            </a:extLst>
+          </p:cNvPr>
+          <p:cNvSpPr/>
+          <p:nvPr/>
+        </p:nvSpPr>
+        <p:spPr>
+          <a:xfrm>
+            <a:off x="2269367" y="4673601"/>
+            <a:ext cx="2853267" cy="584200"/>
+          </a:xfrm>
+          <a:prstGeom prst="rect">
+            <a:avLst/>
+          </a:prstGeom>
           <a:noFill/>
-        </p:spPr>
-        <p:txBody>
-          <a:bodyPr wrap="none" rtlCol="0">
-            <a:spAutoFit/>
-          </a:bodyPr>
-          <a:lstStyle/>
-          <a:p>
-            <a:r>
-              <a:rPr lang="ja-JP" altLang="en-US" sz="2400" dirty="0"/>
-              <a:t>実行して</a:t>
-            </a:r>
-            <a:r>
-              <a:rPr lang="ja-JP" altLang="en-US" sz="2400" b="1" dirty="0">
-                <a:solidFill>
-                  <a:srgbClr val="FF9900"/>
-                </a:solidFill>
-              </a:rPr>
-              <a:t>コイン</a:t>
-            </a:r>
-            <a:r>
-              <a:rPr lang="ja-JP" altLang="en-US" sz="2400" dirty="0"/>
-              <a:t>がとれるか確認しましょう！！</a:t>
-            </a:r>
-            <a:endParaRPr lang="en-US" altLang="ja-JP" sz="2400" dirty="0"/>
+          <a:ln w="38100">
+            <a:solidFill>
+              <a:srgbClr val="FF0000"/>
+            </a:solidFill>
+          </a:ln>
+        </p:spPr>
+        <p:style>
+          <a:lnRef idx="2">
+            <a:schemeClr val="accent1">
+              <a:shade val="50000"/>
+            </a:schemeClr>
+          </a:lnRef>
+          <a:fillRef idx="1">
+            <a:schemeClr val="accent1"/>
+          </a:fillRef>
+          <a:effectRef idx="0">
+            <a:schemeClr val="accent1"/>
+          </a:effectRef>
+          <a:fontRef idx="minor">
+            <a:schemeClr val="lt1"/>
+          </a:fontRef>
+        </p:style>
+        <p:txBody>
+          <a:bodyPr rtlCol="0" anchor="ctr"/>
+          <a:lstStyle/>
+          <a:p>
+            <a:pPr algn="ctr"/>
+            <a:endParaRPr kumimoji="1" lang="ja-JP" altLang="en-US"/>
           </a:p>
         </p:txBody>
       </p:sp>
     </p:spTree>
     <p:extLst>
       <p:ext uri="{BB962C8B-B14F-4D97-AF65-F5344CB8AC3E}">
-        <p14:creationId xmlns:p14="http://schemas.microsoft.com/office/powerpoint/2010/main" val="1251649344"/>
+        <p14:creationId xmlns:p14="http://schemas.microsoft.com/office/powerpoint/2010/main" val="1312901314"/>
       </p:ext>
     </p:extLst>
   </p:cSld>
@@ -4423,8 +4541,12 @@
           <a:lstStyle/>
           <a:p>
             <a:r>
-              <a:rPr lang="ja-JP" altLang="en-US" sz="2400" dirty="0"/>
-              <a:t>ステージを進めていくと、</a:t>
+              <a:rPr lang="en-US" altLang="ja-JP" sz="2400" b="1" dirty="0">
+                <a:solidFill>
+                  <a:srgbClr val="FF0000"/>
+                </a:solidFill>
+              </a:rPr>
+              <a:t>C++</a:t>
             </a:r>
             <a:r>
               <a:rPr lang="ja-JP" altLang="en-US" sz="2400" b="1" dirty="0">
@@ -4432,18 +4554,15 @@
                   <a:srgbClr val="FF0000"/>
                 </a:solidFill>
               </a:rPr>
-              <a:t>敵</a:t>
-            </a:r>
-            <a:r>
-              <a:rPr lang="ja-JP" altLang="en-US" sz="2400" dirty="0"/>
-              <a:t>が出現します。</a:t>
-            </a:r>
-            <a:endParaRPr lang="en-US" altLang="ja-JP" sz="2400" dirty="0"/>
-          </a:p>
-          <a:p>
-            <a:r>
-              <a:rPr lang="ja-JP" altLang="en-US" sz="2400" dirty="0"/>
-              <a:t>敵をやっつけるために、</a:t>
+              <a:t>を書いたら</a:t>
+            </a:r>
+            <a:r>
+              <a:rPr lang="en-US" altLang="ja-JP" sz="2400" b="1" dirty="0">
+                <a:solidFill>
+                  <a:srgbClr val="FF0000"/>
+                </a:solidFill>
+              </a:rPr>
+              <a:t>Unreal Engine</a:t>
             </a:r>
             <a:r>
               <a:rPr lang="ja-JP" altLang="en-US" sz="2400" b="1" dirty="0">
@@ -4451,20 +4570,171 @@
                   <a:srgbClr val="FF0000"/>
                 </a:solidFill>
               </a:rPr>
-              <a:t>攻撃</a:t>
-            </a:r>
+              <a:t>側に教えなければいけません。</a:t>
+            </a:r>
+            <a:endParaRPr lang="en-US" altLang="ja-JP" sz="2400" b="1" dirty="0">
+              <a:solidFill>
+                <a:srgbClr val="FF0000"/>
+              </a:solidFill>
+            </a:endParaRPr>
+          </a:p>
+          <a:p>
             <a:r>
               <a:rPr lang="ja-JP" altLang="en-US" sz="2400" dirty="0"/>
-              <a:t>をプログラムで実装していきます。</a:t>
+              <a:t>右下に小さな</a:t>
+            </a:r>
+            <a:r>
+              <a:rPr lang="ja-JP" altLang="en-US" sz="2400" b="1" dirty="0">
+                <a:solidFill>
+                  <a:srgbClr val="FF0000"/>
+                </a:solidFill>
+              </a:rPr>
+              <a:t>コンパイルボタン</a:t>
+            </a:r>
+            <a:r>
+              <a:rPr lang="ja-JP" altLang="en-US" sz="2400" dirty="0"/>
+              <a:t>があるので、押してみましょう。</a:t>
             </a:r>
             <a:endParaRPr lang="en-US" altLang="ja-JP" sz="2400" dirty="0"/>
+          </a:p>
+        </p:txBody>
+      </p:sp>
+      <p:sp>
+        <p:nvSpPr>
+          <p:cNvPr id="5" name="テキスト ボックス 4">
+            <a:extLst>
+              <a:ext uri="{FF2B5EF4-FFF2-40B4-BE49-F238E27FC236}">
+                <a16:creationId xmlns:a16="http://schemas.microsoft.com/office/drawing/2014/main" id="{A6EAFAF2-BDAD-46C4-BE93-C91CB15D7D27}"/>
+              </a:ext>
+            </a:extLst>
+          </p:cNvPr>
+          <p:cNvSpPr txBox="1"/>
+          <p:nvPr/>
+        </p:nvSpPr>
+        <p:spPr>
+          <a:xfrm>
+            <a:off x="567542" y="5788429"/>
+            <a:ext cx="6647974" cy="461665"/>
+          </a:xfrm>
+          <a:prstGeom prst="rect">
+            <a:avLst/>
+          </a:prstGeom>
+          <a:noFill/>
+        </p:spPr>
+        <p:txBody>
+          <a:bodyPr wrap="none" rtlCol="0">
+            <a:spAutoFit/>
+          </a:bodyPr>
+          <a:lstStyle/>
+          <a:p>
+            <a:r>
+              <a:rPr lang="ja-JP" altLang="en-US" sz="2400" dirty="0"/>
+              <a:t>実行して</a:t>
+            </a:r>
+            <a:r>
+              <a:rPr lang="ja-JP" altLang="en-US" sz="2400" b="1" dirty="0">
+                <a:solidFill>
+                  <a:srgbClr val="FF9900"/>
+                </a:solidFill>
+              </a:rPr>
+              <a:t>コイン</a:t>
+            </a:r>
+            <a:r>
+              <a:rPr lang="ja-JP" altLang="en-US" sz="2400" dirty="0"/>
+              <a:t>がとれるか確認しましょう！！</a:t>
+            </a:r>
+            <a:endParaRPr lang="en-US" altLang="ja-JP" sz="2400" dirty="0"/>
+          </a:p>
+        </p:txBody>
+      </p:sp>
+      <p:pic>
+        <p:nvPicPr>
+          <p:cNvPr id="3" name="図 2">
+            <a:extLst>
+              <a:ext uri="{FF2B5EF4-FFF2-40B4-BE49-F238E27FC236}">
+                <a16:creationId xmlns:a16="http://schemas.microsoft.com/office/drawing/2014/main" id="{581A2539-54AE-4AD7-BDA7-8E88FD5A927A}"/>
+              </a:ext>
+            </a:extLst>
+          </p:cNvPr>
+          <p:cNvPicPr>
+            <a:picLocks noChangeAspect="1"/>
+          </p:cNvPicPr>
+          <p:nvPr/>
+        </p:nvPicPr>
+        <p:blipFill>
+          <a:blip r:embed="rId2"/>
+          <a:stretch>
+            <a:fillRect/>
+          </a:stretch>
+        </p:blipFill>
+        <p:spPr>
+          <a:xfrm>
+            <a:off x="567542" y="2187126"/>
+            <a:ext cx="9963876" cy="1241874"/>
+          </a:xfrm>
+          <a:prstGeom prst="rect">
+            <a:avLst/>
+          </a:prstGeom>
+        </p:spPr>
+      </p:pic>
+      <p:sp>
+        <p:nvSpPr>
+          <p:cNvPr id="7" name="矢印: 右 6">
+            <a:extLst>
+              <a:ext uri="{FF2B5EF4-FFF2-40B4-BE49-F238E27FC236}">
+                <a16:creationId xmlns:a16="http://schemas.microsoft.com/office/drawing/2014/main" id="{C11E9EE3-3A66-46DD-9D3B-1C9FD3D3AA66}"/>
+              </a:ext>
+            </a:extLst>
+          </p:cNvPr>
+          <p:cNvSpPr/>
+          <p:nvPr/>
+        </p:nvSpPr>
+        <p:spPr>
+          <a:xfrm rot="18234661">
+            <a:off x="4409161" y="3408691"/>
+            <a:ext cx="776827" cy="524934"/>
+          </a:xfrm>
+          <a:prstGeom prst="rightArrow">
+            <a:avLst/>
+          </a:prstGeom>
+          <a:solidFill>
+            <a:srgbClr val="FF0000"/>
+          </a:solidFill>
+          <a:ln>
+            <a:solidFill>
+              <a:schemeClr val="tx1"/>
+            </a:solidFill>
+          </a:ln>
+        </p:spPr>
+        <p:style>
+          <a:lnRef idx="2">
+            <a:schemeClr val="accent1">
+              <a:shade val="50000"/>
+            </a:schemeClr>
+          </a:lnRef>
+          <a:fillRef idx="1">
+            <a:schemeClr val="accent1"/>
+          </a:fillRef>
+          <a:effectRef idx="0">
+            <a:schemeClr val="accent1"/>
+          </a:effectRef>
+          <a:fontRef idx="minor">
+            <a:schemeClr val="lt1"/>
+          </a:fontRef>
+        </p:style>
+        <p:txBody>
+          <a:bodyPr rtlCol="0" anchor="ctr"/>
+          <a:lstStyle/>
+          <a:p>
+            <a:pPr algn="ctr"/>
+            <a:endParaRPr kumimoji="1" lang="ja-JP" altLang="en-US"/>
           </a:p>
         </p:txBody>
       </p:sp>
     </p:spTree>
     <p:extLst>
       <p:ext uri="{BB962C8B-B14F-4D97-AF65-F5344CB8AC3E}">
-        <p14:creationId xmlns:p14="http://schemas.microsoft.com/office/powerpoint/2010/main" val="1389448925"/>
+        <p14:creationId xmlns:p14="http://schemas.microsoft.com/office/powerpoint/2010/main" val="1251649344"/>
       </p:ext>
     </p:extLst>
   </p:cSld>
@@ -4542,7 +4812,7 @@
         <p:spPr>
           <a:xfrm>
             <a:off x="567542" y="1216429"/>
-            <a:ext cx="5764720" cy="461665"/>
+            <a:ext cx="9110186" cy="1200329"/>
           </a:xfrm>
           <a:prstGeom prst="rect">
             <a:avLst/>
@@ -4556,48 +4826,8 @@
           <a:lstStyle/>
           <a:p>
             <a:r>
-              <a:rPr lang="en-US" altLang="ja-JP" sz="2400" dirty="0"/>
-              <a:t>C++</a:t>
-            </a:r>
-            <a:r>
               <a:rPr lang="ja-JP" altLang="en-US" sz="2400" dirty="0"/>
-              <a:t>で以下のように書いてみましょう。</a:t>
-            </a:r>
-            <a:endParaRPr lang="en-US" altLang="ja-JP" sz="2400" dirty="0"/>
-          </a:p>
-        </p:txBody>
-      </p:sp>
-      <p:sp>
-        <p:nvSpPr>
-          <p:cNvPr id="5" name="テキスト ボックス 4">
-            <a:extLst>
-              <a:ext uri="{FF2B5EF4-FFF2-40B4-BE49-F238E27FC236}">
-                <a16:creationId xmlns:a16="http://schemas.microsoft.com/office/drawing/2014/main" id="{5F91C99E-110B-477C-9BB7-A07A1B418655}"/>
-              </a:ext>
-            </a:extLst>
-          </p:cNvPr>
-          <p:cNvSpPr txBox="1"/>
-          <p:nvPr/>
-        </p:nvSpPr>
-        <p:spPr>
-          <a:xfrm>
-            <a:off x="567542" y="5771495"/>
-            <a:ext cx="8319906" cy="830997"/>
-          </a:xfrm>
-          <a:prstGeom prst="rect">
-            <a:avLst/>
-          </a:prstGeom>
-          <a:noFill/>
-        </p:spPr>
-        <p:txBody>
-          <a:bodyPr wrap="none" rtlCol="0">
-            <a:spAutoFit/>
-          </a:bodyPr>
-          <a:lstStyle/>
-          <a:p>
-            <a:r>
-              <a:rPr lang="ja-JP" altLang="en-US" sz="2400" dirty="0"/>
-              <a:t>書き終わったら </a:t>
+              <a:t>ステージを進めていくと、</a:t>
             </a:r>
             <a:r>
               <a:rPr lang="ja-JP" altLang="en-US" sz="2400" b="1" dirty="0">
@@ -4605,43 +4835,154 @@
                   <a:srgbClr val="FF0000"/>
                 </a:solidFill>
               </a:rPr>
-              <a:t>保存 → コンパイルボタン → 実行</a:t>
+              <a:t>敵</a:t>
             </a:r>
             <a:r>
               <a:rPr lang="ja-JP" altLang="en-US" sz="2400" dirty="0"/>
-              <a:t>をして、</a:t>
+              <a:t>が出現します。</a:t>
             </a:r>
             <a:endParaRPr lang="en-US" altLang="ja-JP" sz="2400" dirty="0"/>
+          </a:p>
+          <a:p>
+            <a:r>
+              <a:rPr lang="ja-JP" altLang="en-US" sz="2400" dirty="0"/>
+              <a:t>敵をやっつけるために、</a:t>
+            </a:r>
+            <a:r>
+              <a:rPr lang="ja-JP" altLang="en-US" sz="2400" b="1" dirty="0">
+                <a:solidFill>
+                  <a:srgbClr val="FF0000"/>
+                </a:solidFill>
+              </a:rPr>
+              <a:t>攻撃</a:t>
+            </a:r>
+            <a:r>
+              <a:rPr lang="ja-JP" altLang="en-US" sz="2400" dirty="0"/>
+              <a:t>をプログラムで実装していきます。</a:t>
+            </a:r>
+            <a:endParaRPr lang="en-US" altLang="ja-JP" sz="2400" b="1" dirty="0">
+              <a:solidFill>
+                <a:srgbClr val="7030A0"/>
+              </a:solidFill>
+            </a:endParaRPr>
           </a:p>
           <a:p>
             <a:r>
               <a:rPr lang="en-US" altLang="ja-JP" sz="2400" b="1" dirty="0">
                 <a:solidFill>
-                  <a:srgbClr val="0070C0"/>
+                  <a:srgbClr val="7030A0"/>
                 </a:solidFill>
               </a:rPr>
-              <a:t>X</a:t>
-            </a:r>
-            <a:r>
-              <a:rPr lang="ja-JP" altLang="en-US" sz="2400" b="1" dirty="0">
+              <a:t>Visual Studio</a:t>
+            </a:r>
+            <a:r>
+              <a:rPr lang="ja-JP" altLang="en-US" sz="2400" dirty="0"/>
+              <a:t>の</a:t>
+            </a:r>
+            <a:r>
+              <a:rPr lang="en-US" altLang="ja-JP" sz="2400" b="1" dirty="0">
                 <a:solidFill>
-                  <a:srgbClr val="0070C0"/>
+                  <a:srgbClr val="FF0000"/>
                 </a:solidFill>
               </a:rPr>
-              <a:t>ボタン</a:t>
+              <a:t>Magician.cpp</a:t>
             </a:r>
             <a:r>
               <a:rPr lang="ja-JP" altLang="en-US" sz="2400" dirty="0"/>
-              <a:t>を押してみましょう。</a:t>
+              <a:t>を開きましょう。</a:t>
             </a:r>
             <a:endParaRPr lang="en-US" altLang="ja-JP" sz="2400" dirty="0"/>
+          </a:p>
+        </p:txBody>
+      </p:sp>
+      <p:pic>
+        <p:nvPicPr>
+          <p:cNvPr id="3" name="図 2">
+            <a:extLst>
+              <a:ext uri="{FF2B5EF4-FFF2-40B4-BE49-F238E27FC236}">
+                <a16:creationId xmlns:a16="http://schemas.microsoft.com/office/drawing/2014/main" id="{52E6DF1A-B752-46FD-AC35-28E8CDB567D4}"/>
+              </a:ext>
+            </a:extLst>
+          </p:cNvPr>
+          <p:cNvPicPr>
+            <a:picLocks noChangeAspect="1"/>
+          </p:cNvPicPr>
+          <p:nvPr/>
+        </p:nvPicPr>
+        <p:blipFill>
+          <a:blip r:embed="rId2"/>
+          <a:stretch>
+            <a:fillRect/>
+          </a:stretch>
+        </p:blipFill>
+        <p:spPr>
+          <a:xfrm>
+            <a:off x="567542" y="2556458"/>
+            <a:ext cx="3562786" cy="3886675"/>
+          </a:xfrm>
+          <a:prstGeom prst="rect">
+            <a:avLst/>
+          </a:prstGeom>
+        </p:spPr>
+      </p:pic>
+      <p:sp>
+        <p:nvSpPr>
+          <p:cNvPr id="7" name="矢印: 右 6">
+            <a:extLst>
+              <a:ext uri="{FF2B5EF4-FFF2-40B4-BE49-F238E27FC236}">
+                <a16:creationId xmlns:a16="http://schemas.microsoft.com/office/drawing/2014/main" id="{6272AFA5-5138-41CE-949B-7CB7F0726AF0}"/>
+              </a:ext>
+            </a:extLst>
+          </p:cNvPr>
+          <p:cNvSpPr/>
+          <p:nvPr/>
+        </p:nvSpPr>
+        <p:spPr>
+          <a:xfrm rot="18234661">
+            <a:off x="1801427" y="5948691"/>
+            <a:ext cx="776827" cy="524934"/>
+          </a:xfrm>
+          <a:prstGeom prst="rightArrow">
+            <a:avLst/>
+          </a:prstGeom>
+          <a:solidFill>
+            <a:srgbClr val="FF0000"/>
+          </a:solidFill>
+          <a:ln>
+            <a:solidFill>
+              <a:schemeClr val="tx1"/>
+            </a:solidFill>
+          </a:ln>
+        </p:spPr>
+        <p:style>
+          <a:lnRef idx="2">
+            <a:schemeClr val="accent1">
+              <a:shade val="50000"/>
+            </a:schemeClr>
+          </a:lnRef>
+          <a:fillRef idx="1">
+            <a:schemeClr val="accent1"/>
+          </a:fillRef>
+          <a:effectRef idx="0">
+            <a:schemeClr val="accent1"/>
+          </a:effectRef>
+          <a:fontRef idx="minor">
+            <a:schemeClr val="lt1"/>
+          </a:fontRef>
+        </p:style>
+        <p:txBody>
+          <a:bodyPr rtlCol="0" anchor="ctr"/>
+          <a:lstStyle/>
+          <a:p>
+            <a:pPr algn="ctr"/>
+            <a:endParaRPr kumimoji="1" lang="ja-JP" altLang="en-US"/>
           </a:p>
         </p:txBody>
       </p:sp>
     </p:spTree>
     <p:extLst>
       <p:ext uri="{BB962C8B-B14F-4D97-AF65-F5344CB8AC3E}">
-        <p14:creationId xmlns:p14="http://schemas.microsoft.com/office/powerpoint/2010/main" val="499895268"/>
+        <p14:creationId xmlns:p14="http://schemas.microsoft.com/office/powerpoint/2010/main" val="1389448925"/>
       </p:ext>
     </p:extLst>
   </p:cSld>
@@ -4719,7 +5060,7 @@
         <p:spPr>
           <a:xfrm>
             <a:off x="567542" y="1216429"/>
-            <a:ext cx="7263527" cy="830997"/>
+            <a:ext cx="5764720" cy="461665"/>
           </a:xfrm>
           <a:prstGeom prst="rect">
             <a:avLst/>
@@ -4733,59 +5074,71 @@
           <a:lstStyle/>
           <a:p>
             <a:r>
+              <a:rPr lang="en-US" altLang="ja-JP" sz="2400" dirty="0"/>
+              <a:t>C++</a:t>
+            </a:r>
+            <a:r>
               <a:rPr lang="ja-JP" altLang="en-US" sz="2400" dirty="0"/>
-              <a:t>アクションゲームで大事なことは、</a:t>
+              <a:t>で以下のように書いてみましょう。</a:t>
             </a:r>
             <a:endParaRPr lang="en-US" altLang="ja-JP" sz="2400" dirty="0"/>
           </a:p>
-          <a:p>
+        </p:txBody>
+      </p:sp>
+      <p:sp>
+        <p:nvSpPr>
+          <p:cNvPr id="5" name="テキスト ボックス 4">
+            <a:extLst>
+              <a:ext uri="{FF2B5EF4-FFF2-40B4-BE49-F238E27FC236}">
+                <a16:creationId xmlns:a16="http://schemas.microsoft.com/office/drawing/2014/main" id="{5F91C99E-110B-477C-9BB7-A07A1B418655}"/>
+              </a:ext>
+            </a:extLst>
+          </p:cNvPr>
+          <p:cNvSpPr txBox="1"/>
+          <p:nvPr/>
+        </p:nvSpPr>
+        <p:spPr>
+          <a:xfrm>
+            <a:off x="567542" y="5771495"/>
+            <a:ext cx="8319906" cy="830997"/>
+          </a:xfrm>
+          <a:prstGeom prst="rect">
+            <a:avLst/>
+          </a:prstGeom>
+          <a:noFill/>
+        </p:spPr>
+        <p:txBody>
+          <a:bodyPr wrap="none" rtlCol="0">
+            <a:spAutoFit/>
+          </a:bodyPr>
+          <a:lstStyle/>
+          <a:p>
+            <a:r>
+              <a:rPr lang="ja-JP" altLang="en-US" sz="2400" dirty="0"/>
+              <a:t>書き終わったら </a:t>
+            </a:r>
             <a:r>
               <a:rPr lang="ja-JP" altLang="en-US" sz="2400" b="1" dirty="0">
                 <a:solidFill>
                   <a:srgbClr val="FF0000"/>
                 </a:solidFill>
               </a:rPr>
-              <a:t>敵をやっつけて気持ち良いと感じるかどうか</a:t>
+              <a:t>保存 → コンパイルボタン → 実行</a:t>
             </a:r>
             <a:r>
               <a:rPr lang="ja-JP" altLang="en-US" sz="2400" dirty="0"/>
-              <a:t>です。</a:t>
+              <a:t>をして、</a:t>
             </a:r>
             <a:endParaRPr lang="en-US" altLang="ja-JP" sz="2400" dirty="0"/>
           </a:p>
-        </p:txBody>
-      </p:sp>
-      <p:sp>
-        <p:nvSpPr>
-          <p:cNvPr id="7" name="テキスト ボックス 6">
-            <a:extLst>
-              <a:ext uri="{FF2B5EF4-FFF2-40B4-BE49-F238E27FC236}">
-                <a16:creationId xmlns:a16="http://schemas.microsoft.com/office/drawing/2014/main" id="{9F53DD6C-E45D-4399-9D63-AE50E346FE78}"/>
-              </a:ext>
-            </a:extLst>
-          </p:cNvPr>
-          <p:cNvSpPr txBox="1"/>
-          <p:nvPr/>
-        </p:nvSpPr>
-        <p:spPr>
-          <a:xfrm>
-            <a:off x="567541" y="5763029"/>
-            <a:ext cx="9110186" cy="830997"/>
-          </a:xfrm>
-          <a:prstGeom prst="rect">
-            <a:avLst/>
-          </a:prstGeom>
-          <a:noFill/>
-        </p:spPr>
-        <p:txBody>
-          <a:bodyPr wrap="none" rtlCol="0">
-            <a:spAutoFit/>
-          </a:bodyPr>
-          <a:lstStyle/>
-          <a:p>
-            <a:r>
-              <a:rPr lang="ja-JP" altLang="en-US" sz="2400" dirty="0"/>
-              <a:t>今のままだと</a:t>
+          <a:p>
+            <a:r>
+              <a:rPr lang="en-US" altLang="ja-JP" sz="2400" b="1" dirty="0">
+                <a:solidFill>
+                  <a:srgbClr val="0070C0"/>
+                </a:solidFill>
+              </a:rPr>
+              <a:t>X</a:t>
             </a:r>
             <a:r>
               <a:rPr lang="ja-JP" altLang="en-US" sz="2400" b="1" dirty="0">
@@ -4793,39 +5146,102 @@
                   <a:srgbClr val="0070C0"/>
                 </a:solidFill>
               </a:rPr>
-              <a:t>あまり気持ちよくない</a:t>
+              <a:t>ボタン</a:t>
             </a:r>
             <a:r>
               <a:rPr lang="ja-JP" altLang="en-US" sz="2400" dirty="0"/>
-              <a:t>ですよね。。</a:t>
+              <a:t>を押してみましょう。</a:t>
             </a:r>
             <a:endParaRPr lang="en-US" altLang="ja-JP" sz="2400" dirty="0"/>
           </a:p>
-          <a:p>
-            <a:r>
-              <a:rPr lang="ja-JP" altLang="en-US" sz="2400" dirty="0"/>
-              <a:t>今回は、敵をやっつけて嬉しくなるように、</a:t>
-            </a:r>
-            <a:r>
-              <a:rPr lang="ja-JP" altLang="en-US" sz="2400" b="1" dirty="0">
-                <a:solidFill>
-                  <a:srgbClr val="FF0000"/>
-                </a:solidFill>
-              </a:rPr>
-              <a:t>演出</a:t>
-            </a:r>
-            <a:r>
-              <a:rPr lang="ja-JP" altLang="en-US" sz="2400" dirty="0"/>
-              <a:t>を追加します。</a:t>
-            </a:r>
-            <a:endParaRPr lang="en-US" altLang="ja-JP" sz="2400" dirty="0"/>
+        </p:txBody>
+      </p:sp>
+      <p:pic>
+        <p:nvPicPr>
+          <p:cNvPr id="3" name="図 2">
+            <a:extLst>
+              <a:ext uri="{FF2B5EF4-FFF2-40B4-BE49-F238E27FC236}">
+                <a16:creationId xmlns:a16="http://schemas.microsoft.com/office/drawing/2014/main" id="{A582520D-D933-4606-99AA-B1D8DC76F2E5}"/>
+              </a:ext>
+            </a:extLst>
+          </p:cNvPr>
+          <p:cNvPicPr>
+            <a:picLocks noChangeAspect="1"/>
+          </p:cNvPicPr>
+          <p:nvPr/>
+        </p:nvPicPr>
+        <p:blipFill>
+          <a:blip r:embed="rId2"/>
+          <a:stretch>
+            <a:fillRect/>
+          </a:stretch>
+        </p:blipFill>
+        <p:spPr>
+          <a:xfrm>
+            <a:off x="567542" y="1729028"/>
+            <a:ext cx="10145541" cy="3991532"/>
+          </a:xfrm>
+          <a:prstGeom prst="rect">
+            <a:avLst/>
+          </a:prstGeom>
+        </p:spPr>
+      </p:pic>
+      <p:sp>
+        <p:nvSpPr>
+          <p:cNvPr id="7" name="正方形/長方形 6">
+            <a:extLst>
+              <a:ext uri="{FF2B5EF4-FFF2-40B4-BE49-F238E27FC236}">
+                <a16:creationId xmlns:a16="http://schemas.microsoft.com/office/drawing/2014/main" id="{0C4C30B0-9FBE-4500-A09E-51FDC19A0C8C}"/>
+              </a:ext>
+            </a:extLst>
+          </p:cNvPr>
+          <p:cNvSpPr/>
+          <p:nvPr/>
+        </p:nvSpPr>
+        <p:spPr>
+          <a:xfrm>
+            <a:off x="2819399" y="4334933"/>
+            <a:ext cx="7984067" cy="575734"/>
+          </a:xfrm>
+          <a:prstGeom prst="rect">
+            <a:avLst/>
+          </a:prstGeom>
+          <a:noFill/>
+          <a:ln w="38100">
+            <a:solidFill>
+              <a:srgbClr val="FF0000"/>
+            </a:solidFill>
+          </a:ln>
+        </p:spPr>
+        <p:style>
+          <a:lnRef idx="2">
+            <a:schemeClr val="accent1">
+              <a:shade val="50000"/>
+            </a:schemeClr>
+          </a:lnRef>
+          <a:fillRef idx="1">
+            <a:schemeClr val="accent1"/>
+          </a:fillRef>
+          <a:effectRef idx="0">
+            <a:schemeClr val="accent1"/>
+          </a:effectRef>
+          <a:fontRef idx="minor">
+            <a:schemeClr val="lt1"/>
+          </a:fontRef>
+        </p:style>
+        <p:txBody>
+          <a:bodyPr rtlCol="0" anchor="ctr"/>
+          <a:lstStyle/>
+          <a:p>
+            <a:pPr algn="ctr"/>
+            <a:endParaRPr kumimoji="1" lang="ja-JP" altLang="en-US"/>
           </a:p>
         </p:txBody>
       </p:sp>
     </p:spTree>
     <p:extLst>
       <p:ext uri="{BB962C8B-B14F-4D97-AF65-F5344CB8AC3E}">
-        <p14:creationId xmlns:p14="http://schemas.microsoft.com/office/powerpoint/2010/main" val="4099386392"/>
+        <p14:creationId xmlns:p14="http://schemas.microsoft.com/office/powerpoint/2010/main" val="499895268"/>
       </p:ext>
     </p:extLst>
   </p:cSld>
@@ -4903,7 +5319,7 @@
         <p:spPr>
           <a:xfrm>
             <a:off x="567542" y="1216429"/>
-            <a:ext cx="9725739" cy="1200329"/>
+            <a:ext cx="7263527" cy="830997"/>
           </a:xfrm>
           <a:prstGeom prst="rect">
             <a:avLst/>
@@ -4918,26 +5334,77 @@
           <a:p>
             <a:r>
               <a:rPr lang="ja-JP" altLang="en-US" sz="2400" dirty="0"/>
-              <a:t>弾丸が敵に当たったら</a:t>
-            </a:r>
+              <a:t>アクションゲームで大事なことは、</a:t>
+            </a:r>
+            <a:endParaRPr lang="en-US" altLang="ja-JP" sz="2400" dirty="0"/>
+          </a:p>
+          <a:p>
             <a:r>
               <a:rPr lang="ja-JP" altLang="en-US" sz="2400" b="1" dirty="0">
                 <a:solidFill>
                   <a:srgbClr val="FF0000"/>
                 </a:solidFill>
               </a:rPr>
-              <a:t>ヒットエフェクト</a:t>
+              <a:t>敵をやっつけて気持ち良いと感じるかどうか</a:t>
             </a:r>
             <a:r>
               <a:rPr lang="ja-JP" altLang="en-US" sz="2400" dirty="0"/>
-              <a:t>が出るようにします。</a:t>
+              <a:t>です。</a:t>
             </a:r>
             <a:endParaRPr lang="en-US" altLang="ja-JP" sz="2400" dirty="0"/>
           </a:p>
+        </p:txBody>
+      </p:sp>
+      <p:sp>
+        <p:nvSpPr>
+          <p:cNvPr id="7" name="テキスト ボックス 6">
+            <a:extLst>
+              <a:ext uri="{FF2B5EF4-FFF2-40B4-BE49-F238E27FC236}">
+                <a16:creationId xmlns:a16="http://schemas.microsoft.com/office/drawing/2014/main" id="{9F53DD6C-E45D-4399-9D63-AE50E346FE78}"/>
+              </a:ext>
+            </a:extLst>
+          </p:cNvPr>
+          <p:cNvSpPr txBox="1"/>
+          <p:nvPr/>
+        </p:nvSpPr>
+        <p:spPr>
+          <a:xfrm>
+            <a:off x="567541" y="5763029"/>
+            <a:ext cx="9110186" cy="830997"/>
+          </a:xfrm>
+          <a:prstGeom prst="rect">
+            <a:avLst/>
+          </a:prstGeom>
+          <a:noFill/>
+        </p:spPr>
+        <p:txBody>
+          <a:bodyPr wrap="none" rtlCol="0">
+            <a:spAutoFit/>
+          </a:bodyPr>
+          <a:lstStyle/>
           <a:p>
             <a:r>
               <a:rPr lang="ja-JP" altLang="en-US" sz="2400" dirty="0"/>
-              <a:t>エフェクトとは</a:t>
+              <a:t>今のままだと</a:t>
+            </a:r>
+            <a:r>
+              <a:rPr lang="ja-JP" altLang="en-US" sz="2400" b="1" dirty="0">
+                <a:solidFill>
+                  <a:srgbClr val="0070C0"/>
+                </a:solidFill>
+              </a:rPr>
+              <a:t>あまり気持ちよくない</a:t>
+            </a:r>
+            <a:r>
+              <a:rPr lang="ja-JP" altLang="en-US" sz="2400" dirty="0"/>
+              <a:t>ですよね。。</a:t>
+            </a:r>
+            <a:endParaRPr lang="en-US" altLang="ja-JP" sz="2400" dirty="0"/>
+          </a:p>
+          <a:p>
+            <a:r>
+              <a:rPr lang="ja-JP" altLang="en-US" sz="2400" dirty="0"/>
+              <a:t>今回は、敵をやっつけて嬉しくなるように、</a:t>
             </a:r>
             <a:r>
               <a:rPr lang="ja-JP" altLang="en-US" sz="2400" b="1" dirty="0">
@@ -4945,98 +5412,11 @@
                   <a:srgbClr val="FF0000"/>
                 </a:solidFill>
               </a:rPr>
-              <a:t>ゲームの飾りつけをするアニメーション</a:t>
+              <a:t>演出</a:t>
             </a:r>
             <a:r>
               <a:rPr lang="ja-JP" altLang="en-US" sz="2400" dirty="0"/>
-              <a:t>のことです。</a:t>
-            </a:r>
-            <a:endParaRPr lang="en-US" altLang="ja-JP" sz="2400" dirty="0"/>
-          </a:p>
-          <a:p>
-            <a:r>
-              <a:rPr lang="ja-JP" altLang="en-US" sz="2400" b="1" dirty="0">
-                <a:solidFill>
-                  <a:srgbClr val="FF0000"/>
-                </a:solidFill>
-              </a:rPr>
-              <a:t>炎</a:t>
-            </a:r>
-            <a:r>
-              <a:rPr lang="ja-JP" altLang="en-US" sz="2400" dirty="0"/>
-              <a:t>、</a:t>
-            </a:r>
-            <a:r>
-              <a:rPr lang="ja-JP" altLang="en-US" sz="2400" b="1" dirty="0">
-                <a:solidFill>
-                  <a:srgbClr val="0070C0"/>
-                </a:solidFill>
-              </a:rPr>
-              <a:t>電撃</a:t>
-            </a:r>
-            <a:r>
-              <a:rPr lang="ja-JP" altLang="en-US" sz="2400" dirty="0"/>
-              <a:t>、</a:t>
-            </a:r>
-            <a:r>
-              <a:rPr lang="ja-JP" altLang="en-US" sz="2400" b="1" dirty="0">
-                <a:solidFill>
-                  <a:srgbClr val="FFC000"/>
-                </a:solidFill>
-              </a:rPr>
-              <a:t>爆発</a:t>
-            </a:r>
-            <a:r>
-              <a:rPr lang="ja-JP" altLang="en-US" sz="2400" dirty="0"/>
-              <a:t>、</a:t>
-            </a:r>
-            <a:r>
-              <a:rPr lang="ja-JP" altLang="en-US" sz="2400" b="1" dirty="0">
-                <a:solidFill>
-                  <a:srgbClr val="00B050"/>
-                </a:solidFill>
-              </a:rPr>
-              <a:t>衝撃波</a:t>
-            </a:r>
-            <a:r>
-              <a:rPr lang="ja-JP" altLang="en-US" sz="2400" dirty="0"/>
-              <a:t>など</a:t>
-            </a:r>
-            <a:endParaRPr lang="en-US" altLang="ja-JP" sz="2400" dirty="0"/>
-          </a:p>
-        </p:txBody>
-      </p:sp>
-      <p:sp>
-        <p:nvSpPr>
-          <p:cNvPr id="7" name="テキスト ボックス 6">
-            <a:extLst>
-              <a:ext uri="{FF2B5EF4-FFF2-40B4-BE49-F238E27FC236}">
-                <a16:creationId xmlns:a16="http://schemas.microsoft.com/office/drawing/2014/main" id="{9F53DD6C-E45D-4399-9D63-AE50E346FE78}"/>
-              </a:ext>
-            </a:extLst>
-          </p:cNvPr>
-          <p:cNvSpPr txBox="1"/>
-          <p:nvPr/>
-        </p:nvSpPr>
-        <p:spPr>
-          <a:xfrm>
-            <a:off x="567541" y="5763029"/>
-            <a:ext cx="5109091" cy="461665"/>
-          </a:xfrm>
-          <a:prstGeom prst="rect">
-            <a:avLst/>
-          </a:prstGeom>
-          <a:noFill/>
-        </p:spPr>
-        <p:txBody>
-          <a:bodyPr wrap="none" rtlCol="0">
-            <a:spAutoFit/>
-          </a:bodyPr>
-          <a:lstStyle/>
-          <a:p>
-            <a:r>
-              <a:rPr lang="ja-JP" altLang="en-US" sz="2400" dirty="0"/>
-              <a:t>実行して弾丸を敵に当てましょう。</a:t>
+              <a:t>を追加します。</a:t>
             </a:r>
             <a:endParaRPr lang="en-US" altLang="ja-JP" sz="2400" dirty="0"/>
           </a:p>
@@ -5045,7 +5425,7 @@
     </p:spTree>
     <p:extLst>
       <p:ext uri="{BB962C8B-B14F-4D97-AF65-F5344CB8AC3E}">
-        <p14:creationId xmlns:p14="http://schemas.microsoft.com/office/powerpoint/2010/main" val="424298462"/>
+        <p14:creationId xmlns:p14="http://schemas.microsoft.com/office/powerpoint/2010/main" val="4099386392"/>
       </p:ext>
     </p:extLst>
   </p:cSld>
@@ -5123,7 +5503,7 @@
         <p:spPr>
           <a:xfrm>
             <a:off x="567542" y="1216429"/>
-            <a:ext cx="7571303" cy="830997"/>
+            <a:ext cx="9725739" cy="1200329"/>
           </a:xfrm>
           <a:prstGeom prst="rect">
             <a:avLst/>
@@ -5136,17 +5516,28 @@
           </a:bodyPr>
           <a:lstStyle/>
           <a:p>
+            <a:r>
+              <a:rPr lang="ja-JP" altLang="en-US" sz="2400" dirty="0"/>
+              <a:t>弾丸が敵に当たったら</a:t>
+            </a:r>
             <a:r>
               <a:rPr lang="ja-JP" altLang="en-US" sz="2400" b="1" dirty="0">
                 <a:solidFill>
                   <a:srgbClr val="FF0000"/>
                 </a:solidFill>
               </a:rPr>
-              <a:t>ヒットストップ</a:t>
+              <a:t>ヒットエフェクト</a:t>
             </a:r>
             <a:r>
               <a:rPr lang="ja-JP" altLang="en-US" sz="2400" dirty="0"/>
-              <a:t>を設定して、</a:t>
+              <a:t>が出るようにします。</a:t>
+            </a:r>
+            <a:endParaRPr lang="en-US" altLang="ja-JP" sz="2400" dirty="0"/>
+          </a:p>
+          <a:p>
+            <a:r>
+              <a:rPr lang="ja-JP" altLang="en-US" sz="2400" dirty="0"/>
+              <a:t>エフェクトとは</a:t>
             </a:r>
             <a:r>
               <a:rPr lang="ja-JP" altLang="en-US" sz="2400" b="1" dirty="0">
@@ -5154,29 +5545,334 @@
                   <a:srgbClr val="FF0000"/>
                 </a:solidFill>
               </a:rPr>
-              <a:t>当たった感を強めます。</a:t>
-            </a:r>
-            <a:endParaRPr lang="en-US" altLang="ja-JP" sz="2400" b="1" dirty="0">
+              <a:t>ゲームの飾りつけをするアニメーション</a:t>
+            </a:r>
+            <a:r>
+              <a:rPr lang="ja-JP" altLang="en-US" sz="2400" dirty="0"/>
+              <a:t>のことです。</a:t>
+            </a:r>
+            <a:endParaRPr lang="en-US" altLang="ja-JP" sz="2400" dirty="0"/>
+          </a:p>
+          <a:p>
+            <a:r>
+              <a:rPr lang="ja-JP" altLang="en-US" sz="2400" b="1" dirty="0">
+                <a:solidFill>
+                  <a:srgbClr val="FF0000"/>
+                </a:solidFill>
+              </a:rPr>
+              <a:t>炎</a:t>
+            </a:r>
+            <a:r>
+              <a:rPr lang="ja-JP" altLang="en-US" sz="2400" dirty="0"/>
+              <a:t>、</a:t>
+            </a:r>
+            <a:r>
+              <a:rPr lang="ja-JP" altLang="en-US" sz="2400" b="1" dirty="0">
+                <a:solidFill>
+                  <a:srgbClr val="0070C0"/>
+                </a:solidFill>
+              </a:rPr>
+              <a:t>電撃</a:t>
+            </a:r>
+            <a:r>
+              <a:rPr lang="ja-JP" altLang="en-US" sz="2400" dirty="0"/>
+              <a:t>、</a:t>
+            </a:r>
+            <a:r>
+              <a:rPr lang="ja-JP" altLang="en-US" sz="2400" b="1" dirty="0">
+                <a:solidFill>
+                  <a:srgbClr val="FFC000"/>
+                </a:solidFill>
+              </a:rPr>
+              <a:t>爆発</a:t>
+            </a:r>
+            <a:r>
+              <a:rPr lang="ja-JP" altLang="en-US" sz="2400" dirty="0"/>
+              <a:t>、</a:t>
+            </a:r>
+            <a:r>
+              <a:rPr lang="ja-JP" altLang="en-US" sz="2400" b="1" dirty="0">
+                <a:solidFill>
+                  <a:srgbClr val="00B050"/>
+                </a:solidFill>
+              </a:rPr>
+              <a:t>衝撃波</a:t>
+            </a:r>
+            <a:r>
+              <a:rPr lang="ja-JP" altLang="en-US" sz="2400" dirty="0"/>
+              <a:t>など</a:t>
+            </a:r>
+            <a:endParaRPr lang="en-US" altLang="ja-JP" sz="2400" dirty="0"/>
+          </a:p>
+        </p:txBody>
+      </p:sp>
+      <p:sp>
+        <p:nvSpPr>
+          <p:cNvPr id="7" name="テキスト ボックス 6">
+            <a:extLst>
+              <a:ext uri="{FF2B5EF4-FFF2-40B4-BE49-F238E27FC236}">
+                <a16:creationId xmlns:a16="http://schemas.microsoft.com/office/drawing/2014/main" id="{9F53DD6C-E45D-4399-9D63-AE50E346FE78}"/>
+              </a:ext>
+            </a:extLst>
+          </p:cNvPr>
+          <p:cNvSpPr txBox="1"/>
+          <p:nvPr/>
+        </p:nvSpPr>
+        <p:spPr>
+          <a:xfrm>
+            <a:off x="567541" y="6227233"/>
+            <a:ext cx="5109091" cy="461665"/>
+          </a:xfrm>
+          <a:prstGeom prst="rect">
+            <a:avLst/>
+          </a:prstGeom>
+          <a:noFill/>
+        </p:spPr>
+        <p:txBody>
+          <a:bodyPr wrap="none" rtlCol="0">
+            <a:spAutoFit/>
+          </a:bodyPr>
+          <a:lstStyle/>
+          <a:p>
+            <a:r>
+              <a:rPr lang="ja-JP" altLang="en-US" sz="2400" dirty="0"/>
+              <a:t>実行して弾丸を敵に当てましょう。</a:t>
+            </a:r>
+            <a:endParaRPr lang="en-US" altLang="ja-JP" sz="2400" dirty="0"/>
+          </a:p>
+        </p:txBody>
+      </p:sp>
+      <p:pic>
+        <p:nvPicPr>
+          <p:cNvPr id="3" name="図 2">
+            <a:extLst>
+              <a:ext uri="{FF2B5EF4-FFF2-40B4-BE49-F238E27FC236}">
+                <a16:creationId xmlns:a16="http://schemas.microsoft.com/office/drawing/2014/main" id="{3F6306C5-22A4-45C2-8435-BDF184C1D2F2}"/>
+              </a:ext>
+            </a:extLst>
+          </p:cNvPr>
+          <p:cNvPicPr>
+            <a:picLocks noChangeAspect="1"/>
+          </p:cNvPicPr>
+          <p:nvPr/>
+        </p:nvPicPr>
+        <p:blipFill>
+          <a:blip r:embed="rId2"/>
+          <a:stretch>
+            <a:fillRect/>
+          </a:stretch>
+        </p:blipFill>
+        <p:spPr>
+          <a:xfrm>
+            <a:off x="6651535" y="2556458"/>
+            <a:ext cx="3899790" cy="4135403"/>
+          </a:xfrm>
+          <a:prstGeom prst="rect">
+            <a:avLst/>
+          </a:prstGeom>
+        </p:spPr>
+      </p:pic>
+      <p:pic>
+        <p:nvPicPr>
+          <p:cNvPr id="8" name="図 7">
+            <a:extLst>
+              <a:ext uri="{FF2B5EF4-FFF2-40B4-BE49-F238E27FC236}">
+                <a16:creationId xmlns:a16="http://schemas.microsoft.com/office/drawing/2014/main" id="{5AFAE87B-7EE8-4250-A71A-8CE1597C9017}"/>
+              </a:ext>
+            </a:extLst>
+          </p:cNvPr>
+          <p:cNvPicPr>
+            <a:picLocks noChangeAspect="1"/>
+          </p:cNvPicPr>
+          <p:nvPr/>
+        </p:nvPicPr>
+        <p:blipFill>
+          <a:blip r:embed="rId3"/>
+          <a:stretch>
+            <a:fillRect/>
+          </a:stretch>
+        </p:blipFill>
+        <p:spPr>
+          <a:xfrm>
+            <a:off x="567541" y="2556458"/>
+            <a:ext cx="4267796" cy="2953162"/>
+          </a:xfrm>
+          <a:prstGeom prst="rect">
+            <a:avLst/>
+          </a:prstGeom>
+        </p:spPr>
+      </p:pic>
+      <p:sp>
+        <p:nvSpPr>
+          <p:cNvPr id="9" name="矢印: 右 8">
+            <a:extLst>
+              <a:ext uri="{FF2B5EF4-FFF2-40B4-BE49-F238E27FC236}">
+                <a16:creationId xmlns:a16="http://schemas.microsoft.com/office/drawing/2014/main" id="{F242E171-8846-4777-8B83-DB37EF3B09E6}"/>
+              </a:ext>
+            </a:extLst>
+          </p:cNvPr>
+          <p:cNvSpPr/>
+          <p:nvPr/>
+        </p:nvSpPr>
+        <p:spPr>
+          <a:xfrm>
+            <a:off x="4899805" y="3705025"/>
+            <a:ext cx="1687262" cy="524934"/>
+          </a:xfrm>
+          <a:prstGeom prst="rightArrow">
+            <a:avLst/>
+          </a:prstGeom>
+          <a:solidFill>
+            <a:srgbClr val="FF0000"/>
+          </a:solidFill>
+          <a:ln>
+            <a:solidFill>
+              <a:schemeClr val="tx1"/>
+            </a:solidFill>
+          </a:ln>
+        </p:spPr>
+        <p:style>
+          <a:lnRef idx="2">
+            <a:schemeClr val="accent1">
+              <a:shade val="50000"/>
+            </a:schemeClr>
+          </a:lnRef>
+          <a:fillRef idx="1">
+            <a:schemeClr val="accent1"/>
+          </a:fillRef>
+          <a:effectRef idx="0">
+            <a:schemeClr val="accent1"/>
+          </a:effectRef>
+          <a:fontRef idx="minor">
+            <a:schemeClr val="lt1"/>
+          </a:fontRef>
+        </p:style>
+        <p:txBody>
+          <a:bodyPr rtlCol="0" anchor="ctr"/>
+          <a:lstStyle/>
+          <a:p>
+            <a:pPr algn="ctr"/>
+            <a:endParaRPr kumimoji="1" lang="ja-JP" altLang="en-US"/>
+          </a:p>
+        </p:txBody>
+      </p:sp>
+      <p:sp>
+        <p:nvSpPr>
+          <p:cNvPr id="10" name="正方形/長方形 9">
+            <a:extLst>
+              <a:ext uri="{FF2B5EF4-FFF2-40B4-BE49-F238E27FC236}">
+                <a16:creationId xmlns:a16="http://schemas.microsoft.com/office/drawing/2014/main" id="{66B23E0C-430A-4EBB-801E-0BA43010D31B}"/>
+              </a:ext>
+            </a:extLst>
+          </p:cNvPr>
+          <p:cNvSpPr/>
+          <p:nvPr/>
+        </p:nvSpPr>
+        <p:spPr>
+          <a:xfrm>
+            <a:off x="6651536" y="5985933"/>
+            <a:ext cx="3899790" cy="482600"/>
+          </a:xfrm>
+          <a:prstGeom prst="rect">
+            <a:avLst/>
+          </a:prstGeom>
+          <a:noFill/>
+          <a:ln w="38100">
+            <a:solidFill>
+              <a:srgbClr val="FF0000"/>
+            </a:solidFill>
+          </a:ln>
+        </p:spPr>
+        <p:style>
+          <a:lnRef idx="2">
+            <a:schemeClr val="accent1">
+              <a:shade val="50000"/>
+            </a:schemeClr>
+          </a:lnRef>
+          <a:fillRef idx="1">
+            <a:schemeClr val="accent1"/>
+          </a:fillRef>
+          <a:effectRef idx="0">
+            <a:schemeClr val="accent1"/>
+          </a:effectRef>
+          <a:fontRef idx="minor">
+            <a:schemeClr val="lt1"/>
+          </a:fontRef>
+        </p:style>
+        <p:txBody>
+          <a:bodyPr rtlCol="0" anchor="ctr"/>
+          <a:lstStyle/>
+          <a:p>
+            <a:pPr algn="ctr"/>
+            <a:endParaRPr kumimoji="1" lang="ja-JP" altLang="en-US"/>
+          </a:p>
+        </p:txBody>
+      </p:sp>
+      <p:sp>
+        <p:nvSpPr>
+          <p:cNvPr id="11" name="テキスト ボックス 10">
+            <a:extLst>
+              <a:ext uri="{FF2B5EF4-FFF2-40B4-BE49-F238E27FC236}">
+                <a16:creationId xmlns:a16="http://schemas.microsoft.com/office/drawing/2014/main" id="{C61A9F67-1248-4CA0-96C2-49D12C70A21B}"/>
+              </a:ext>
+            </a:extLst>
+          </p:cNvPr>
+          <p:cNvSpPr txBox="1"/>
+          <p:nvPr/>
+        </p:nvSpPr>
+        <p:spPr>
+          <a:xfrm>
+            <a:off x="3011076" y="4778295"/>
+            <a:ext cx="2900153" cy="338554"/>
+          </a:xfrm>
+          <a:prstGeom prst="rect">
+            <a:avLst/>
+          </a:prstGeom>
+          <a:solidFill>
+            <a:schemeClr val="bg1"/>
+          </a:solidFill>
+          <a:ln>
+            <a:solidFill>
+              <a:schemeClr val="tx1"/>
+            </a:solidFill>
+          </a:ln>
+        </p:spPr>
+        <p:txBody>
+          <a:bodyPr wrap="none" rtlCol="0">
+            <a:spAutoFit/>
+          </a:bodyPr>
+          <a:lstStyle/>
+          <a:p>
+            <a:r>
+              <a:rPr lang="en-US" altLang="ja-JP" sz="1600" b="1" dirty="0" err="1">
+                <a:solidFill>
+                  <a:srgbClr val="FF0000"/>
+                </a:solidFill>
+              </a:rPr>
+              <a:t>BP_MagicianBullet</a:t>
+            </a:r>
+            <a:r>
+              <a:rPr lang="ja-JP" altLang="en-US" sz="1600" b="1" dirty="0">
+                <a:solidFill>
+                  <a:srgbClr val="FF0000"/>
+                </a:solidFill>
+              </a:rPr>
+              <a:t>を開いて</a:t>
+            </a:r>
+            <a:endParaRPr lang="en-US" altLang="ja-JP" sz="1600" b="1" dirty="0">
               <a:solidFill>
                 <a:srgbClr val="FF0000"/>
               </a:solidFill>
             </a:endParaRPr>
           </a:p>
-          <a:p>
-            <a:r>
-              <a:rPr lang="ja-JP" altLang="en-US" sz="2400" dirty="0"/>
-              <a:t>スマブラにも使われている、有名な演出です。</a:t>
-            </a:r>
-            <a:endParaRPr lang="en-US" altLang="ja-JP" sz="2400" dirty="0"/>
-          </a:p>
-        </p:txBody>
-      </p:sp>
-      <p:sp>
-        <p:nvSpPr>
-          <p:cNvPr id="7" name="テキスト ボックス 6">
-            <a:extLst>
-              <a:ext uri="{FF2B5EF4-FFF2-40B4-BE49-F238E27FC236}">
-                <a16:creationId xmlns:a16="http://schemas.microsoft.com/office/drawing/2014/main" id="{9F53DD6C-E45D-4399-9D63-AE50E346FE78}"/>
+        </p:txBody>
+      </p:sp>
+      <p:sp>
+        <p:nvSpPr>
+          <p:cNvPr id="12" name="テキスト ボックス 11">
+            <a:extLst>
+              <a:ext uri="{FF2B5EF4-FFF2-40B4-BE49-F238E27FC236}">
+                <a16:creationId xmlns:a16="http://schemas.microsoft.com/office/drawing/2014/main" id="{16893B75-38A5-46A2-AE59-4FCE920452EA}"/>
               </a:ext>
             </a:extLst>
           </p:cNvPr>
@@ -5185,13 +5881,20 @@
         </p:nvSpPr>
         <p:spPr>
           <a:xfrm>
-            <a:off x="567541" y="5763029"/>
-            <a:ext cx="5109091" cy="461665"/>
+            <a:off x="6651534" y="5593328"/>
+            <a:ext cx="3156633" cy="338554"/>
           </a:xfrm>
           <a:prstGeom prst="rect">
             <a:avLst/>
           </a:prstGeom>
-          <a:noFill/>
+          <a:solidFill>
+            <a:schemeClr val="bg1"/>
+          </a:solidFill>
+          <a:ln>
+            <a:solidFill>
+              <a:schemeClr val="tx1"/>
+            </a:solidFill>
+          </a:ln>
         </p:spPr>
         <p:txBody>
           <a:bodyPr wrap="none" rtlCol="0">
@@ -5200,17 +5903,49 @@
           <a:lstStyle/>
           <a:p>
             <a:r>
-              <a:rPr lang="ja-JP" altLang="en-US" sz="2400" dirty="0"/>
-              <a:t>実行して弾丸を敵に当てましょう。</a:t>
-            </a:r>
-            <a:endParaRPr lang="en-US" altLang="ja-JP" sz="2400" dirty="0"/>
+              <a:rPr lang="en-US" altLang="ja-JP" sz="1600" b="1" dirty="0">
+                <a:solidFill>
+                  <a:srgbClr val="FF0000"/>
+                </a:solidFill>
+              </a:rPr>
+              <a:t>M Hit Effect</a:t>
+            </a:r>
+            <a:r>
+              <a:rPr lang="ja-JP" altLang="en-US" sz="1600" b="1" dirty="0">
+                <a:solidFill>
+                  <a:srgbClr val="FF0000"/>
+                </a:solidFill>
+              </a:rPr>
+              <a:t>を「</a:t>
+            </a:r>
+            <a:r>
+              <a:rPr lang="en-US" altLang="ja-JP" sz="1600" b="1" dirty="0">
+                <a:solidFill>
+                  <a:srgbClr val="FF0000"/>
+                </a:solidFill>
+              </a:rPr>
+              <a:t>Hit00</a:t>
+            </a:r>
+            <a:r>
+              <a:rPr lang="ja-JP" altLang="en-US" sz="1600" b="1" dirty="0">
+                <a:solidFill>
+                  <a:srgbClr val="FF0000"/>
+                </a:solidFill>
+              </a:rPr>
+              <a:t>」に設定</a:t>
+            </a:r>
+            <a:endParaRPr lang="en-US" altLang="ja-JP" sz="1600" b="1" dirty="0">
+              <a:solidFill>
+                <a:srgbClr val="FF0000"/>
+              </a:solidFill>
+            </a:endParaRPr>
           </a:p>
         </p:txBody>
       </p:sp>
     </p:spTree>
     <p:extLst>
       <p:ext uri="{BB962C8B-B14F-4D97-AF65-F5344CB8AC3E}">
-        <p14:creationId xmlns:p14="http://schemas.microsoft.com/office/powerpoint/2010/main" val="3580522964"/>
+        <p14:creationId xmlns:p14="http://schemas.microsoft.com/office/powerpoint/2010/main" val="424298462"/>
       </p:ext>
     </p:extLst>
   </p:cSld>
@@ -5288,7 +6023,7 @@
         <p:spPr>
           <a:xfrm>
             <a:off x="567542" y="1216429"/>
-            <a:ext cx="6340197" cy="461665"/>
+            <a:ext cx="7571303" cy="830997"/>
           </a:xfrm>
           <a:prstGeom prst="rect">
             <a:avLst/>
@@ -5301,61 +6036,17 @@
           </a:bodyPr>
           <a:lstStyle/>
           <a:p>
-            <a:r>
-              <a:rPr lang="ja-JP" altLang="en-US" sz="2400" dirty="0"/>
-              <a:t>敵がやられたら</a:t>
-            </a:r>
             <a:r>
               <a:rPr lang="ja-JP" altLang="en-US" sz="2400" b="1" dirty="0">
                 <a:solidFill>
                   <a:srgbClr val="FF0000"/>
                 </a:solidFill>
               </a:rPr>
-              <a:t>吹っ飛ぶ</a:t>
+              <a:t>ヒットストップ</a:t>
             </a:r>
             <a:r>
               <a:rPr lang="ja-JP" altLang="en-US" sz="2400" dirty="0"/>
-              <a:t>ようにしましょう。</a:t>
-            </a:r>
-            <a:endParaRPr lang="en-US" altLang="ja-JP" sz="2400" dirty="0"/>
-          </a:p>
-        </p:txBody>
-      </p:sp>
-      <p:sp>
-        <p:nvSpPr>
-          <p:cNvPr id="7" name="テキスト ボックス 6">
-            <a:extLst>
-              <a:ext uri="{FF2B5EF4-FFF2-40B4-BE49-F238E27FC236}">
-                <a16:creationId xmlns:a16="http://schemas.microsoft.com/office/drawing/2014/main" id="{9F53DD6C-E45D-4399-9D63-AE50E346FE78}"/>
-              </a:ext>
-            </a:extLst>
-          </p:cNvPr>
-          <p:cNvSpPr txBox="1"/>
-          <p:nvPr/>
-        </p:nvSpPr>
-        <p:spPr>
-          <a:xfrm>
-            <a:off x="567541" y="5763029"/>
-            <a:ext cx="9765815" cy="461665"/>
-          </a:xfrm>
-          <a:prstGeom prst="rect">
-            <a:avLst/>
-          </a:prstGeom>
-          <a:noFill/>
-        </p:spPr>
-        <p:txBody>
-          <a:bodyPr wrap="none" rtlCol="0">
-            <a:spAutoFit/>
-          </a:bodyPr>
-          <a:lstStyle/>
-          <a:p>
-            <a:r>
-              <a:rPr lang="en-US" altLang="ja-JP" sz="2400" dirty="0"/>
-              <a:t>C++</a:t>
-            </a:r>
-            <a:r>
-              <a:rPr lang="ja-JP" altLang="en-US" sz="2400" dirty="0"/>
-              <a:t>を書いたので、</a:t>
+              <a:t>を設定して、</a:t>
             </a:r>
             <a:r>
               <a:rPr lang="ja-JP" altLang="en-US" sz="2400" b="1" dirty="0">
@@ -5363,20 +6054,347 @@
                   <a:srgbClr val="FF0000"/>
                 </a:solidFill>
               </a:rPr>
-              <a:t>保存、コンパイルを忘れないように</a:t>
-            </a:r>
+              <a:t>当たった感を強めます。</a:t>
+            </a:r>
+            <a:endParaRPr lang="en-US" altLang="ja-JP" sz="2400" b="1" dirty="0">
+              <a:solidFill>
+                <a:srgbClr val="FF0000"/>
+              </a:solidFill>
+            </a:endParaRPr>
+          </a:p>
+          <a:p>
             <a:r>
               <a:rPr lang="ja-JP" altLang="en-US" sz="2400" dirty="0"/>
-              <a:t>しましょう。</a:t>
+              <a:t>スマブラにも使われている、有名な演出です。</a:t>
             </a:r>
             <a:endParaRPr lang="en-US" altLang="ja-JP" sz="2400" dirty="0"/>
+          </a:p>
+        </p:txBody>
+      </p:sp>
+      <p:sp>
+        <p:nvSpPr>
+          <p:cNvPr id="7" name="テキスト ボックス 6">
+            <a:extLst>
+              <a:ext uri="{FF2B5EF4-FFF2-40B4-BE49-F238E27FC236}">
+                <a16:creationId xmlns:a16="http://schemas.microsoft.com/office/drawing/2014/main" id="{9F53DD6C-E45D-4399-9D63-AE50E346FE78}"/>
+              </a:ext>
+            </a:extLst>
+          </p:cNvPr>
+          <p:cNvSpPr txBox="1"/>
+          <p:nvPr/>
+        </p:nvSpPr>
+        <p:spPr>
+          <a:xfrm>
+            <a:off x="567541" y="5763029"/>
+            <a:ext cx="5109091" cy="461665"/>
+          </a:xfrm>
+          <a:prstGeom prst="rect">
+            <a:avLst/>
+          </a:prstGeom>
+          <a:noFill/>
+        </p:spPr>
+        <p:txBody>
+          <a:bodyPr wrap="none" rtlCol="0">
+            <a:spAutoFit/>
+          </a:bodyPr>
+          <a:lstStyle/>
+          <a:p>
+            <a:r>
+              <a:rPr lang="ja-JP" altLang="en-US" sz="2400" dirty="0"/>
+              <a:t>実行して弾丸を敵に当てましょう。</a:t>
+            </a:r>
+            <a:endParaRPr lang="en-US" altLang="ja-JP" sz="2400" dirty="0"/>
+          </a:p>
+        </p:txBody>
+      </p:sp>
+      <p:pic>
+        <p:nvPicPr>
+          <p:cNvPr id="3" name="図 2">
+            <a:extLst>
+              <a:ext uri="{FF2B5EF4-FFF2-40B4-BE49-F238E27FC236}">
+                <a16:creationId xmlns:a16="http://schemas.microsoft.com/office/drawing/2014/main" id="{4E005566-A3B5-4CB3-B18F-BAC2C130333B}"/>
+              </a:ext>
+            </a:extLst>
+          </p:cNvPr>
+          <p:cNvPicPr>
+            <a:picLocks noChangeAspect="1"/>
+          </p:cNvPicPr>
+          <p:nvPr/>
+        </p:nvPicPr>
+        <p:blipFill>
+          <a:blip r:embed="rId2"/>
+          <a:stretch>
+            <a:fillRect/>
+          </a:stretch>
+        </p:blipFill>
+        <p:spPr>
+          <a:xfrm>
+            <a:off x="567541" y="2271462"/>
+            <a:ext cx="5496692" cy="3267531"/>
+          </a:xfrm>
+          <a:prstGeom prst="rect">
+            <a:avLst/>
+          </a:prstGeom>
+        </p:spPr>
+      </p:pic>
+      <p:pic>
+        <p:nvPicPr>
+          <p:cNvPr id="8" name="図 7">
+            <a:extLst>
+              <a:ext uri="{FF2B5EF4-FFF2-40B4-BE49-F238E27FC236}">
+                <a16:creationId xmlns:a16="http://schemas.microsoft.com/office/drawing/2014/main" id="{FE193B84-74E3-4EF1-8465-B0276F5468A8}"/>
+              </a:ext>
+            </a:extLst>
+          </p:cNvPr>
+          <p:cNvPicPr>
+            <a:picLocks noChangeAspect="1"/>
+          </p:cNvPicPr>
+          <p:nvPr/>
+        </p:nvPicPr>
+        <p:blipFill>
+          <a:blip r:embed="rId3"/>
+          <a:stretch>
+            <a:fillRect/>
+          </a:stretch>
+        </p:blipFill>
+        <p:spPr>
+          <a:xfrm>
+            <a:off x="7070874" y="2271462"/>
+            <a:ext cx="4553585" cy="2343477"/>
+          </a:xfrm>
+          <a:prstGeom prst="rect">
+            <a:avLst/>
+          </a:prstGeom>
+        </p:spPr>
+      </p:pic>
+      <p:sp>
+        <p:nvSpPr>
+          <p:cNvPr id="9" name="矢印: 右 8">
+            <a:extLst>
+              <a:ext uri="{FF2B5EF4-FFF2-40B4-BE49-F238E27FC236}">
+                <a16:creationId xmlns:a16="http://schemas.microsoft.com/office/drawing/2014/main" id="{F87F0251-0093-4B90-BE2A-327BEA5F621F}"/>
+              </a:ext>
+            </a:extLst>
+          </p:cNvPr>
+          <p:cNvSpPr/>
+          <p:nvPr/>
+        </p:nvSpPr>
+        <p:spPr>
+          <a:xfrm>
+            <a:off x="6179140" y="3380293"/>
+            <a:ext cx="776827" cy="524934"/>
+          </a:xfrm>
+          <a:prstGeom prst="rightArrow">
+            <a:avLst/>
+          </a:prstGeom>
+          <a:solidFill>
+            <a:srgbClr val="FF0000"/>
+          </a:solidFill>
+          <a:ln>
+            <a:solidFill>
+              <a:schemeClr val="tx1"/>
+            </a:solidFill>
+          </a:ln>
+        </p:spPr>
+        <p:style>
+          <a:lnRef idx="2">
+            <a:schemeClr val="accent1">
+              <a:shade val="50000"/>
+            </a:schemeClr>
+          </a:lnRef>
+          <a:fillRef idx="1">
+            <a:schemeClr val="accent1"/>
+          </a:fillRef>
+          <a:effectRef idx="0">
+            <a:schemeClr val="accent1"/>
+          </a:effectRef>
+          <a:fontRef idx="minor">
+            <a:schemeClr val="lt1"/>
+          </a:fontRef>
+        </p:style>
+        <p:txBody>
+          <a:bodyPr rtlCol="0" anchor="ctr"/>
+          <a:lstStyle/>
+          <a:p>
+            <a:pPr algn="ctr"/>
+            <a:endParaRPr kumimoji="1" lang="ja-JP" altLang="en-US"/>
+          </a:p>
+        </p:txBody>
+      </p:sp>
+      <p:sp>
+        <p:nvSpPr>
+          <p:cNvPr id="10" name="テキスト ボックス 9">
+            <a:extLst>
+              <a:ext uri="{FF2B5EF4-FFF2-40B4-BE49-F238E27FC236}">
+                <a16:creationId xmlns:a16="http://schemas.microsoft.com/office/drawing/2014/main" id="{A99B19BC-9905-4819-9522-C9FA706D5D67}"/>
+              </a:ext>
+            </a:extLst>
+          </p:cNvPr>
+          <p:cNvSpPr txBox="1"/>
+          <p:nvPr/>
+        </p:nvSpPr>
+        <p:spPr>
+          <a:xfrm>
+            <a:off x="4221809" y="4614939"/>
+            <a:ext cx="2630848" cy="338554"/>
+          </a:xfrm>
+          <a:prstGeom prst="rect">
+            <a:avLst/>
+          </a:prstGeom>
+          <a:solidFill>
+            <a:schemeClr val="bg1"/>
+          </a:solidFill>
+          <a:ln>
+            <a:solidFill>
+              <a:schemeClr val="tx1"/>
+            </a:solidFill>
+          </a:ln>
+        </p:spPr>
+        <p:txBody>
+          <a:bodyPr wrap="none" rtlCol="0">
+            <a:spAutoFit/>
+          </a:bodyPr>
+          <a:lstStyle/>
+          <a:p>
+            <a:r>
+              <a:rPr lang="en-US" altLang="ja-JP" sz="1600" b="1" dirty="0" err="1">
+                <a:solidFill>
+                  <a:srgbClr val="FF0000"/>
+                </a:solidFill>
+              </a:rPr>
+              <a:t>BP_EnemyMush</a:t>
+            </a:r>
+            <a:r>
+              <a:rPr lang="ja-JP" altLang="en-US" sz="1600" b="1" dirty="0">
+                <a:solidFill>
+                  <a:srgbClr val="FF0000"/>
+                </a:solidFill>
+              </a:rPr>
+              <a:t>を開いて</a:t>
+            </a:r>
+            <a:endParaRPr lang="en-US" altLang="ja-JP" sz="1600" b="1" dirty="0">
+              <a:solidFill>
+                <a:srgbClr val="FF0000"/>
+              </a:solidFill>
+            </a:endParaRPr>
+          </a:p>
+        </p:txBody>
+      </p:sp>
+      <p:sp>
+        <p:nvSpPr>
+          <p:cNvPr id="11" name="テキスト ボックス 10">
+            <a:extLst>
+              <a:ext uri="{FF2B5EF4-FFF2-40B4-BE49-F238E27FC236}">
+                <a16:creationId xmlns:a16="http://schemas.microsoft.com/office/drawing/2014/main" id="{F5F2B2F6-BE52-4257-A7E6-F948EB626E67}"/>
+              </a:ext>
+            </a:extLst>
+          </p:cNvPr>
+          <p:cNvSpPr txBox="1"/>
+          <p:nvPr/>
+        </p:nvSpPr>
+        <p:spPr>
+          <a:xfrm>
+            <a:off x="7174184" y="3735950"/>
+            <a:ext cx="2432076" cy="338554"/>
+          </a:xfrm>
+          <a:prstGeom prst="rect">
+            <a:avLst/>
+          </a:prstGeom>
+          <a:solidFill>
+            <a:schemeClr val="bg1"/>
+          </a:solidFill>
+          <a:ln>
+            <a:solidFill>
+              <a:schemeClr val="tx1"/>
+            </a:solidFill>
+          </a:ln>
+        </p:spPr>
+        <p:txBody>
+          <a:bodyPr wrap="none" rtlCol="0">
+            <a:spAutoFit/>
+          </a:bodyPr>
+          <a:lstStyle/>
+          <a:p>
+            <a:r>
+              <a:rPr lang="en-US" altLang="ja-JP" sz="1600" b="1" dirty="0">
+                <a:solidFill>
+                  <a:srgbClr val="FF0000"/>
+                </a:solidFill>
+              </a:rPr>
+              <a:t>M Hit Stop Time</a:t>
+            </a:r>
+            <a:r>
+              <a:rPr lang="ja-JP" altLang="en-US" sz="1600" b="1" dirty="0">
+                <a:solidFill>
+                  <a:srgbClr val="FF0000"/>
+                </a:solidFill>
+              </a:rPr>
+              <a:t>を設定</a:t>
+            </a:r>
+            <a:endParaRPr lang="en-US" altLang="ja-JP" sz="1600" b="1" dirty="0">
+              <a:solidFill>
+                <a:srgbClr val="FF0000"/>
+              </a:solidFill>
+            </a:endParaRPr>
+          </a:p>
+        </p:txBody>
+      </p:sp>
+      <p:sp>
+        <p:nvSpPr>
+          <p:cNvPr id="12" name="正方形/長方形 11">
+            <a:extLst>
+              <a:ext uri="{FF2B5EF4-FFF2-40B4-BE49-F238E27FC236}">
+                <a16:creationId xmlns:a16="http://schemas.microsoft.com/office/drawing/2014/main" id="{DEE2F801-B6E9-4709-8B5B-F027E1811B6F}"/>
+              </a:ext>
+            </a:extLst>
+          </p:cNvPr>
+          <p:cNvSpPr/>
+          <p:nvPr/>
+        </p:nvSpPr>
+        <p:spPr>
+          <a:xfrm>
+            <a:off x="7174184" y="4132339"/>
+            <a:ext cx="3899790" cy="261861"/>
+          </a:xfrm>
+          <a:prstGeom prst="rect">
+            <a:avLst/>
+          </a:prstGeom>
+          <a:noFill/>
+          <a:ln w="38100">
+            <a:solidFill>
+              <a:srgbClr val="FF0000"/>
+            </a:solidFill>
+          </a:ln>
+        </p:spPr>
+        <p:style>
+          <a:lnRef idx="2">
+            <a:schemeClr val="accent1">
+              <a:shade val="50000"/>
+            </a:schemeClr>
+          </a:lnRef>
+          <a:fillRef idx="1">
+            <a:schemeClr val="accent1"/>
+          </a:fillRef>
+          <a:effectRef idx="0">
+            <a:schemeClr val="accent1"/>
+          </a:effectRef>
+          <a:fontRef idx="minor">
+            <a:schemeClr val="lt1"/>
+          </a:fontRef>
+        </p:style>
+        <p:txBody>
+          <a:bodyPr rtlCol="0" anchor="ctr"/>
+          <a:lstStyle/>
+          <a:p>
+            <a:pPr algn="ctr"/>
+            <a:endParaRPr kumimoji="1" lang="ja-JP" altLang="en-US"/>
           </a:p>
         </p:txBody>
       </p:sp>
     </p:spTree>
     <p:extLst>
       <p:ext uri="{BB962C8B-B14F-4D97-AF65-F5344CB8AC3E}">
-        <p14:creationId xmlns:p14="http://schemas.microsoft.com/office/powerpoint/2010/main" val="805065936"/>
+        <p14:creationId xmlns:p14="http://schemas.microsoft.com/office/powerpoint/2010/main" val="3580522964"/>
       </p:ext>
     </p:extLst>
   </p:cSld>
@@ -5454,7 +6472,7 @@
         <p:spPr>
           <a:xfrm>
             <a:off x="567542" y="1216429"/>
-            <a:ext cx="6955750" cy="461665"/>
+            <a:ext cx="6340197" cy="461665"/>
           </a:xfrm>
           <a:prstGeom prst="rect">
             <a:avLst/>
@@ -5469,60 +6487,169 @@
           <a:p>
             <a:r>
               <a:rPr lang="ja-JP" altLang="en-US" sz="2400" dirty="0"/>
-              <a:t>敵が消えるときにもエフェクトを出しましょう。</a:t>
-            </a:r>
-            <a:endParaRPr lang="en-US" altLang="ja-JP" sz="2400" dirty="0"/>
-          </a:p>
-        </p:txBody>
-      </p:sp>
-      <p:sp>
-        <p:nvSpPr>
-          <p:cNvPr id="7" name="テキスト ボックス 6">
-            <a:extLst>
-              <a:ext uri="{FF2B5EF4-FFF2-40B4-BE49-F238E27FC236}">
-                <a16:creationId xmlns:a16="http://schemas.microsoft.com/office/drawing/2014/main" id="{9F53DD6C-E45D-4399-9D63-AE50E346FE78}"/>
-              </a:ext>
-            </a:extLst>
-          </p:cNvPr>
-          <p:cNvSpPr txBox="1"/>
-          <p:nvPr/>
-        </p:nvSpPr>
-        <p:spPr>
-          <a:xfrm>
-            <a:off x="567541" y="5763029"/>
-            <a:ext cx="9110186" cy="461665"/>
-          </a:xfrm>
-          <a:prstGeom prst="rect">
-            <a:avLst/>
-          </a:prstGeom>
-          <a:noFill/>
-        </p:spPr>
-        <p:txBody>
-          <a:bodyPr wrap="none" rtlCol="0">
-            <a:spAutoFit/>
-          </a:bodyPr>
-          <a:lstStyle/>
-          <a:p>
+              <a:t>敵がやられたら</a:t>
+            </a:r>
             <a:r>
               <a:rPr lang="ja-JP" altLang="en-US" sz="2400" b="1" dirty="0">
                 <a:solidFill>
                   <a:srgbClr val="FF0000"/>
                 </a:solidFill>
               </a:rPr>
-              <a:t>最初より、敵をやっつけることが楽しくなっているはずです！！</a:t>
-            </a:r>
-            <a:endParaRPr lang="en-US" altLang="ja-JP" sz="2400" b="1" dirty="0">
-              <a:solidFill>
-                <a:srgbClr val="FF0000"/>
-              </a:solidFill>
-            </a:endParaRPr>
+              <a:t>吹っ飛ぶ</a:t>
+            </a:r>
+            <a:r>
+              <a:rPr lang="ja-JP" altLang="en-US" sz="2400" dirty="0"/>
+              <a:t>ようにしましょう。</a:t>
+            </a:r>
+            <a:endParaRPr lang="en-US" altLang="ja-JP" sz="2400" dirty="0"/>
+          </a:p>
+        </p:txBody>
+      </p:sp>
+      <p:sp>
+        <p:nvSpPr>
+          <p:cNvPr id="7" name="テキスト ボックス 6">
+            <a:extLst>
+              <a:ext uri="{FF2B5EF4-FFF2-40B4-BE49-F238E27FC236}">
+                <a16:creationId xmlns:a16="http://schemas.microsoft.com/office/drawing/2014/main" id="{9F53DD6C-E45D-4399-9D63-AE50E346FE78}"/>
+              </a:ext>
+            </a:extLst>
+          </p:cNvPr>
+          <p:cNvSpPr txBox="1"/>
+          <p:nvPr/>
+        </p:nvSpPr>
+        <p:spPr>
+          <a:xfrm>
+            <a:off x="567542" y="5535049"/>
+            <a:ext cx="9765815" cy="830997"/>
+          </a:xfrm>
+          <a:prstGeom prst="rect">
+            <a:avLst/>
+          </a:prstGeom>
+          <a:noFill/>
+        </p:spPr>
+        <p:txBody>
+          <a:bodyPr wrap="none" rtlCol="0">
+            <a:spAutoFit/>
+          </a:bodyPr>
+          <a:lstStyle/>
+          <a:p>
+            <a:r>
+              <a:rPr lang="ja-JP" altLang="en-US" sz="2400" dirty="0"/>
+              <a:t>書いたら動作確認をしましょう。</a:t>
+            </a:r>
+            <a:endParaRPr lang="en-US" altLang="ja-JP" sz="2400" dirty="0"/>
+          </a:p>
+          <a:p>
+            <a:r>
+              <a:rPr lang="en-US" altLang="ja-JP" sz="2400" dirty="0"/>
+              <a:t>C++</a:t>
+            </a:r>
+            <a:r>
+              <a:rPr lang="ja-JP" altLang="en-US" sz="2400" dirty="0"/>
+              <a:t>を書いたので、</a:t>
+            </a:r>
+            <a:r>
+              <a:rPr lang="ja-JP" altLang="en-US" sz="2400" b="1" dirty="0">
+                <a:solidFill>
+                  <a:srgbClr val="FF0000"/>
+                </a:solidFill>
+              </a:rPr>
+              <a:t>保存、コンパイルを忘れないように</a:t>
+            </a:r>
+            <a:r>
+              <a:rPr lang="ja-JP" altLang="en-US" sz="2400" dirty="0"/>
+              <a:t>しましょう。</a:t>
+            </a:r>
+            <a:endParaRPr lang="en-US" altLang="ja-JP" sz="2400" dirty="0"/>
+          </a:p>
+        </p:txBody>
+      </p:sp>
+      <p:pic>
+        <p:nvPicPr>
+          <p:cNvPr id="3" name="図 2">
+            <a:extLst>
+              <a:ext uri="{FF2B5EF4-FFF2-40B4-BE49-F238E27FC236}">
+                <a16:creationId xmlns:a16="http://schemas.microsoft.com/office/drawing/2014/main" id="{B6C5D076-24F0-45A8-8C2F-9AC36311B0EB}"/>
+              </a:ext>
+            </a:extLst>
+          </p:cNvPr>
+          <p:cNvPicPr>
+            <a:picLocks noChangeAspect="1"/>
+          </p:cNvPicPr>
+          <p:nvPr/>
+        </p:nvPicPr>
+        <p:blipFill>
+          <a:blip r:embed="rId2"/>
+          <a:stretch>
+            <a:fillRect/>
+          </a:stretch>
+        </p:blipFill>
+        <p:spPr>
+          <a:xfrm>
+            <a:off x="567542" y="1748009"/>
+            <a:ext cx="7907591" cy="3717125"/>
+          </a:xfrm>
+          <a:prstGeom prst="rect">
+            <a:avLst/>
+          </a:prstGeom>
+        </p:spPr>
+      </p:pic>
+      <p:sp>
+        <p:nvSpPr>
+          <p:cNvPr id="8" name="正方形/長方形 7">
+            <a:extLst>
+              <a:ext uri="{FF2B5EF4-FFF2-40B4-BE49-F238E27FC236}">
+                <a16:creationId xmlns:a16="http://schemas.microsoft.com/office/drawing/2014/main" id="{18853624-D3FF-4CBF-981D-F1F0115CA137}"/>
+              </a:ext>
+            </a:extLst>
+          </p:cNvPr>
+          <p:cNvSpPr/>
+          <p:nvPr/>
+        </p:nvSpPr>
+        <p:spPr>
+          <a:xfrm>
+            <a:off x="1524000" y="4360333"/>
+            <a:ext cx="2675468" cy="550334"/>
+          </a:xfrm>
+          <a:prstGeom prst="rect">
+            <a:avLst/>
+          </a:prstGeom>
+          <a:noFill/>
+          <a:ln w="38100">
+            <a:solidFill>
+              <a:srgbClr val="FF0000"/>
+            </a:solidFill>
+          </a:ln>
+        </p:spPr>
+        <p:style>
+          <a:lnRef idx="2">
+            <a:schemeClr val="accent1">
+              <a:shade val="50000"/>
+            </a:schemeClr>
+          </a:lnRef>
+          <a:fillRef idx="1">
+            <a:schemeClr val="accent1"/>
+          </a:fillRef>
+          <a:effectRef idx="0">
+            <a:schemeClr val="accent1"/>
+          </a:effectRef>
+          <a:fontRef idx="minor">
+            <a:schemeClr val="lt1"/>
+          </a:fontRef>
+        </p:style>
+        <p:txBody>
+          <a:bodyPr rtlCol="0" anchor="ctr"/>
+          <a:lstStyle/>
+          <a:p>
+            <a:pPr algn="ctr"/>
+            <a:endParaRPr kumimoji="1" lang="ja-JP" altLang="en-US"/>
           </a:p>
         </p:txBody>
       </p:sp>
     </p:spTree>
     <p:extLst>
       <p:ext uri="{BB962C8B-B14F-4D97-AF65-F5344CB8AC3E}">
-        <p14:creationId xmlns:p14="http://schemas.microsoft.com/office/powerpoint/2010/main" val="1378075712"/>
+        <p14:creationId xmlns:p14="http://schemas.microsoft.com/office/powerpoint/2010/main" val="805065936"/>
       </p:ext>
     </p:extLst>
   </p:cSld>
@@ -5834,7 +6961,7 @@
         <p:spPr>
           <a:xfrm>
             <a:off x="567542" y="1216429"/>
-            <a:ext cx="6340197" cy="2677656"/>
+            <a:ext cx="6955750" cy="461665"/>
           </a:xfrm>
           <a:prstGeom prst="rect">
             <a:avLst/>
@@ -5849,13 +6976,39 @@
           <a:p>
             <a:r>
               <a:rPr lang="ja-JP" altLang="en-US" sz="2400" dirty="0"/>
-              <a:t>ステージを進めて遊んでみましょう！</a:t>
+              <a:t>敵が消えるときにもエフェクトを出しましょう。</a:t>
             </a:r>
             <a:endParaRPr lang="en-US" altLang="ja-JP" sz="2400" dirty="0"/>
           </a:p>
-          <a:p>
-            <a:endParaRPr lang="en-US" altLang="ja-JP" sz="2400" dirty="0"/>
-          </a:p>
+        </p:txBody>
+      </p:sp>
+      <p:sp>
+        <p:nvSpPr>
+          <p:cNvPr id="7" name="テキスト ボックス 6">
+            <a:extLst>
+              <a:ext uri="{FF2B5EF4-FFF2-40B4-BE49-F238E27FC236}">
+                <a16:creationId xmlns:a16="http://schemas.microsoft.com/office/drawing/2014/main" id="{9F53DD6C-E45D-4399-9D63-AE50E346FE78}"/>
+              </a:ext>
+            </a:extLst>
+          </p:cNvPr>
+          <p:cNvSpPr txBox="1"/>
+          <p:nvPr/>
+        </p:nvSpPr>
+        <p:spPr>
+          <a:xfrm>
+            <a:off x="567541" y="5763029"/>
+            <a:ext cx="9110186" cy="461665"/>
+          </a:xfrm>
+          <a:prstGeom prst="rect">
+            <a:avLst/>
+          </a:prstGeom>
+          <a:noFill/>
+        </p:spPr>
+        <p:txBody>
+          <a:bodyPr wrap="none" rtlCol="0">
+            <a:spAutoFit/>
+          </a:bodyPr>
+          <a:lstStyle/>
           <a:p>
             <a:r>
               <a:rPr lang="ja-JP" altLang="en-US" sz="2400" b="1" dirty="0">
@@ -5863,7 +7016,7 @@
                   <a:srgbClr val="FF0000"/>
                 </a:solidFill>
               </a:rPr>
-              <a:t>もっとこうしたら面白い！</a:t>
+              <a:t>最初より、敵をやっつけることが楽しくなっているはずです！！</a:t>
             </a:r>
             <a:endParaRPr lang="en-US" altLang="ja-JP" sz="2400" b="1" dirty="0">
               <a:solidFill>
@@ -5871,52 +7024,242 @@
               </a:solidFill>
             </a:endParaRPr>
           </a:p>
-          <a:p>
-            <a:r>
-              <a:rPr lang="ja-JP" altLang="en-US" sz="2400" b="1" dirty="0">
+        </p:txBody>
+      </p:sp>
+      <p:pic>
+        <p:nvPicPr>
+          <p:cNvPr id="5" name="図 4">
+            <a:extLst>
+              <a:ext uri="{FF2B5EF4-FFF2-40B4-BE49-F238E27FC236}">
+                <a16:creationId xmlns:a16="http://schemas.microsoft.com/office/drawing/2014/main" id="{5FF55E57-2E7A-4FD5-9497-B27586702A4D}"/>
+              </a:ext>
+            </a:extLst>
+          </p:cNvPr>
+          <p:cNvPicPr>
+            <a:picLocks noChangeAspect="1"/>
+          </p:cNvPicPr>
+          <p:nvPr/>
+        </p:nvPicPr>
+        <p:blipFill>
+          <a:blip r:embed="rId2"/>
+          <a:stretch>
+            <a:fillRect/>
+          </a:stretch>
+        </p:blipFill>
+        <p:spPr>
+          <a:xfrm>
+            <a:off x="567541" y="2035996"/>
+            <a:ext cx="5496692" cy="3267531"/>
+          </a:xfrm>
+          <a:prstGeom prst="rect">
+            <a:avLst/>
+          </a:prstGeom>
+        </p:spPr>
+      </p:pic>
+      <p:pic>
+        <p:nvPicPr>
+          <p:cNvPr id="8" name="図 7">
+            <a:extLst>
+              <a:ext uri="{FF2B5EF4-FFF2-40B4-BE49-F238E27FC236}">
+                <a16:creationId xmlns:a16="http://schemas.microsoft.com/office/drawing/2014/main" id="{9E73C815-7129-444C-814B-F92BFD1D9DDE}"/>
+              </a:ext>
+            </a:extLst>
+          </p:cNvPr>
+          <p:cNvPicPr>
+            <a:picLocks noChangeAspect="1"/>
+          </p:cNvPicPr>
+          <p:nvPr/>
+        </p:nvPicPr>
+        <p:blipFill>
+          <a:blip r:embed="rId3"/>
+          <a:stretch>
+            <a:fillRect/>
+          </a:stretch>
+        </p:blipFill>
+        <p:spPr>
+          <a:xfrm>
+            <a:off x="7070874" y="2035996"/>
+            <a:ext cx="4553585" cy="2343477"/>
+          </a:xfrm>
+          <a:prstGeom prst="rect">
+            <a:avLst/>
+          </a:prstGeom>
+        </p:spPr>
+      </p:pic>
+      <p:sp>
+        <p:nvSpPr>
+          <p:cNvPr id="9" name="テキスト ボックス 8">
+            <a:extLst>
+              <a:ext uri="{FF2B5EF4-FFF2-40B4-BE49-F238E27FC236}">
+                <a16:creationId xmlns:a16="http://schemas.microsoft.com/office/drawing/2014/main" id="{81596496-C899-4A3D-8D4E-22CBB49B4613}"/>
+              </a:ext>
+            </a:extLst>
+          </p:cNvPr>
+          <p:cNvSpPr txBox="1"/>
+          <p:nvPr/>
+        </p:nvSpPr>
+        <p:spPr>
+          <a:xfrm>
+            <a:off x="4221809" y="4379473"/>
+            <a:ext cx="2630848" cy="338554"/>
+          </a:xfrm>
+          <a:prstGeom prst="rect">
+            <a:avLst/>
+          </a:prstGeom>
+          <a:solidFill>
+            <a:schemeClr val="bg1"/>
+          </a:solidFill>
+          <a:ln>
+            <a:solidFill>
+              <a:schemeClr val="tx1"/>
+            </a:solidFill>
+          </a:ln>
+        </p:spPr>
+        <p:txBody>
+          <a:bodyPr wrap="none" rtlCol="0">
+            <a:spAutoFit/>
+          </a:bodyPr>
+          <a:lstStyle/>
+          <a:p>
+            <a:r>
+              <a:rPr lang="en-US" altLang="ja-JP" sz="1600" b="1" dirty="0" err="1">
                 <a:solidFill>
                   <a:srgbClr val="FF0000"/>
                 </a:solidFill>
               </a:rPr>
-              <a:t>もっとこんなことがしたい！</a:t>
-            </a:r>
-            <a:endParaRPr lang="en-US" altLang="ja-JP" sz="2400" b="1" dirty="0">
+              <a:t>BP_EnemyMush</a:t>
+            </a:r>
+            <a:r>
+              <a:rPr lang="ja-JP" altLang="en-US" sz="1600" b="1" dirty="0">
+                <a:solidFill>
+                  <a:srgbClr val="FF0000"/>
+                </a:solidFill>
+              </a:rPr>
+              <a:t>を開いて</a:t>
+            </a:r>
+            <a:endParaRPr lang="en-US" altLang="ja-JP" sz="1600" b="1" dirty="0">
               <a:solidFill>
                 <a:srgbClr val="FF0000"/>
               </a:solidFill>
             </a:endParaRPr>
           </a:p>
-          <a:p>
-            <a:r>
-              <a:rPr lang="ja-JP" altLang="en-US" sz="2400" dirty="0"/>
-              <a:t>など意見があればどんどん言ってください！</a:t>
-            </a:r>
-            <a:endParaRPr lang="en-US" altLang="ja-JP" sz="2400" dirty="0"/>
-          </a:p>
-          <a:p>
-            <a:endParaRPr lang="en-US" altLang="ja-JP" sz="2400" dirty="0"/>
-          </a:p>
-          <a:p>
-            <a:r>
-              <a:rPr lang="ja-JP" altLang="en-US" sz="2400" b="1" dirty="0">
+        </p:txBody>
+      </p:sp>
+      <p:sp>
+        <p:nvSpPr>
+          <p:cNvPr id="10" name="テキスト ボックス 9">
+            <a:extLst>
+              <a:ext uri="{FF2B5EF4-FFF2-40B4-BE49-F238E27FC236}">
+                <a16:creationId xmlns:a16="http://schemas.microsoft.com/office/drawing/2014/main" id="{162E0DA4-D512-4FEB-A8E6-325F8E7490EC}"/>
+              </a:ext>
+            </a:extLst>
+          </p:cNvPr>
+          <p:cNvSpPr txBox="1"/>
+          <p:nvPr/>
+        </p:nvSpPr>
+        <p:spPr>
+          <a:xfrm>
+            <a:off x="7070874" y="2723096"/>
+            <a:ext cx="2239716" cy="338554"/>
+          </a:xfrm>
+          <a:prstGeom prst="rect">
+            <a:avLst/>
+          </a:prstGeom>
+          <a:solidFill>
+            <a:schemeClr val="bg1"/>
+          </a:solidFill>
+          <a:ln>
+            <a:solidFill>
+              <a:schemeClr val="tx1"/>
+            </a:solidFill>
+          </a:ln>
+        </p:spPr>
+        <p:txBody>
+          <a:bodyPr wrap="none" rtlCol="0">
+            <a:spAutoFit/>
+          </a:bodyPr>
+          <a:lstStyle/>
+          <a:p>
+            <a:r>
+              <a:rPr lang="en-US" altLang="ja-JP" sz="1600" b="1" dirty="0">
                 <a:solidFill>
-                  <a:srgbClr val="00B050"/>
+                  <a:srgbClr val="FF0000"/>
                 </a:solidFill>
               </a:rPr>
-              <a:t>来年のオープンキャンパスに採用されるかも</a:t>
-            </a:r>
-            <a:endParaRPr lang="en-US" altLang="ja-JP" sz="2400" b="1" dirty="0">
+              <a:t>M Dead Effect</a:t>
+            </a:r>
+            <a:r>
+              <a:rPr lang="ja-JP" altLang="en-US" sz="1600" b="1" dirty="0">
+                <a:solidFill>
+                  <a:srgbClr val="FF0000"/>
+                </a:solidFill>
+              </a:rPr>
+              <a:t>を設定</a:t>
+            </a:r>
+            <a:endParaRPr lang="en-US" altLang="ja-JP" sz="1600" b="1" dirty="0">
               <a:solidFill>
-                <a:srgbClr val="00B050"/>
+                <a:srgbClr val="FF0000"/>
               </a:solidFill>
             </a:endParaRPr>
+          </a:p>
+        </p:txBody>
+      </p:sp>
+      <p:sp>
+        <p:nvSpPr>
+          <p:cNvPr id="11" name="正方形/長方形 10">
+            <a:extLst>
+              <a:ext uri="{FF2B5EF4-FFF2-40B4-BE49-F238E27FC236}">
+                <a16:creationId xmlns:a16="http://schemas.microsoft.com/office/drawing/2014/main" id="{31DFA8E7-A630-4486-B6C0-D7420AD62D6C}"/>
+              </a:ext>
+            </a:extLst>
+          </p:cNvPr>
+          <p:cNvSpPr/>
+          <p:nvPr/>
+        </p:nvSpPr>
+        <p:spPr>
+          <a:xfrm>
+            <a:off x="8839200" y="3061650"/>
+            <a:ext cx="2675468" cy="595950"/>
+          </a:xfrm>
+          <a:prstGeom prst="rect">
+            <a:avLst/>
+          </a:prstGeom>
+          <a:noFill/>
+          <a:ln w="38100">
+            <a:solidFill>
+              <a:srgbClr val="FF0000"/>
+            </a:solidFill>
+          </a:ln>
+        </p:spPr>
+        <p:style>
+          <a:lnRef idx="2">
+            <a:schemeClr val="accent1">
+              <a:shade val="50000"/>
+            </a:schemeClr>
+          </a:lnRef>
+          <a:fillRef idx="1">
+            <a:schemeClr val="accent1"/>
+          </a:fillRef>
+          <a:effectRef idx="0">
+            <a:schemeClr val="accent1"/>
+          </a:effectRef>
+          <a:fontRef idx="minor">
+            <a:schemeClr val="lt1"/>
+          </a:fontRef>
+        </p:style>
+        <p:txBody>
+          <a:bodyPr rtlCol="0" anchor="ctr"/>
+          <a:lstStyle/>
+          <a:p>
+            <a:pPr algn="ctr"/>
+            <a:endParaRPr kumimoji="1" lang="ja-JP" altLang="en-US"/>
           </a:p>
         </p:txBody>
       </p:sp>
     </p:spTree>
     <p:extLst>
       <p:ext uri="{BB962C8B-B14F-4D97-AF65-F5344CB8AC3E}">
-        <p14:creationId xmlns:p14="http://schemas.microsoft.com/office/powerpoint/2010/main" val="3705044167"/>
+        <p14:creationId xmlns:p14="http://schemas.microsoft.com/office/powerpoint/2010/main" val="1378075712"/>
       </p:ext>
     </p:extLst>
   </p:cSld>
@@ -5994,7 +7337,167 @@
         <p:spPr>
           <a:xfrm>
             <a:off x="567542" y="1216429"/>
-            <a:ext cx="6742551" cy="830997"/>
+            <a:ext cx="6340197" cy="2677656"/>
+          </a:xfrm>
+          <a:prstGeom prst="rect">
+            <a:avLst/>
+          </a:prstGeom>
+          <a:noFill/>
+        </p:spPr>
+        <p:txBody>
+          <a:bodyPr wrap="none" rtlCol="0">
+            <a:spAutoFit/>
+          </a:bodyPr>
+          <a:lstStyle/>
+          <a:p>
+            <a:r>
+              <a:rPr lang="ja-JP" altLang="en-US" sz="2400" dirty="0"/>
+              <a:t>ステージを進めて遊んでみましょう！</a:t>
+            </a:r>
+            <a:endParaRPr lang="en-US" altLang="ja-JP" sz="2400" dirty="0"/>
+          </a:p>
+          <a:p>
+            <a:endParaRPr lang="en-US" altLang="ja-JP" sz="2400" dirty="0"/>
+          </a:p>
+          <a:p>
+            <a:r>
+              <a:rPr lang="ja-JP" altLang="en-US" sz="2400" b="1" dirty="0">
+                <a:solidFill>
+                  <a:srgbClr val="FF0000"/>
+                </a:solidFill>
+              </a:rPr>
+              <a:t>もっとこうしたら面白い！</a:t>
+            </a:r>
+            <a:endParaRPr lang="en-US" altLang="ja-JP" sz="2400" b="1" dirty="0">
+              <a:solidFill>
+                <a:srgbClr val="FF0000"/>
+              </a:solidFill>
+            </a:endParaRPr>
+          </a:p>
+          <a:p>
+            <a:r>
+              <a:rPr lang="ja-JP" altLang="en-US" sz="2400" b="1" dirty="0">
+                <a:solidFill>
+                  <a:srgbClr val="FF0000"/>
+                </a:solidFill>
+              </a:rPr>
+              <a:t>もっとこんなことがしたい！</a:t>
+            </a:r>
+            <a:endParaRPr lang="en-US" altLang="ja-JP" sz="2400" b="1" dirty="0">
+              <a:solidFill>
+                <a:srgbClr val="FF0000"/>
+              </a:solidFill>
+            </a:endParaRPr>
+          </a:p>
+          <a:p>
+            <a:r>
+              <a:rPr lang="ja-JP" altLang="en-US" sz="2400" dirty="0"/>
+              <a:t>など意見があればどんどん言ってください！</a:t>
+            </a:r>
+            <a:endParaRPr lang="en-US" altLang="ja-JP" sz="2400" dirty="0"/>
+          </a:p>
+          <a:p>
+            <a:endParaRPr lang="en-US" altLang="ja-JP" sz="2400" dirty="0"/>
+          </a:p>
+          <a:p>
+            <a:r>
+              <a:rPr lang="ja-JP" altLang="en-US" sz="2400" b="1" dirty="0">
+                <a:solidFill>
+                  <a:srgbClr val="00B050"/>
+                </a:solidFill>
+              </a:rPr>
+              <a:t>来年のオープンキャンパスに採用されるかも</a:t>
+            </a:r>
+            <a:endParaRPr lang="en-US" altLang="ja-JP" sz="2400" b="1" dirty="0">
+              <a:solidFill>
+                <a:srgbClr val="00B050"/>
+              </a:solidFill>
+            </a:endParaRPr>
+          </a:p>
+        </p:txBody>
+      </p:sp>
+    </p:spTree>
+    <p:extLst>
+      <p:ext uri="{BB962C8B-B14F-4D97-AF65-F5344CB8AC3E}">
+        <p14:creationId xmlns:p14="http://schemas.microsoft.com/office/powerpoint/2010/main" val="3705044167"/>
+      </p:ext>
+    </p:extLst>
+  </p:cSld>
+  <p:clrMapOvr>
+    <a:masterClrMapping/>
+  </p:clrMapOvr>
+</p:sld>
+</file>
+
+<file path=ppt/slides/slide22.xml><?xml version="1.0" encoding="utf-8"?>
+<p:sld xmlns:a="http://schemas.openxmlformats.org/drawingml/2006/main" xmlns:r="http://schemas.openxmlformats.org/officeDocument/2006/relationships" xmlns:p="http://schemas.openxmlformats.org/presentationml/2006/main">
+  <p:cSld>
+    <p:spTree>
+      <p:nvGrpSpPr>
+        <p:cNvPr id="1" name=""/>
+        <p:cNvGrpSpPr/>
+        <p:nvPr/>
+      </p:nvGrpSpPr>
+      <p:grpSpPr>
+        <a:xfrm>
+          <a:off x="0" y="0"/>
+          <a:ext cx="0" cy="0"/>
+          <a:chOff x="0" y="0"/>
+          <a:chExt cx="0" cy="0"/>
+        </a:xfrm>
+      </p:grpSpPr>
+      <p:sp>
+        <p:nvSpPr>
+          <p:cNvPr id="4" name="テキスト ボックス 3">
+            <a:extLst>
+              <a:ext uri="{FF2B5EF4-FFF2-40B4-BE49-F238E27FC236}">
+                <a16:creationId xmlns:a16="http://schemas.microsoft.com/office/drawing/2014/main" id="{5A13BF46-B8C5-48AA-8308-C9ECFF431A18}"/>
+              </a:ext>
+            </a:extLst>
+          </p:cNvPr>
+          <p:cNvSpPr txBox="1"/>
+          <p:nvPr/>
+        </p:nvSpPr>
+        <p:spPr>
+          <a:xfrm>
+            <a:off x="567542" y="491954"/>
+            <a:ext cx="5109091" cy="584775"/>
+          </a:xfrm>
+          <a:prstGeom prst="rect">
+            <a:avLst/>
+          </a:prstGeom>
+          <a:noFill/>
+        </p:spPr>
+        <p:txBody>
+          <a:bodyPr wrap="none" rtlCol="0">
+            <a:spAutoFit/>
+          </a:bodyPr>
+          <a:lstStyle/>
+          <a:p>
+            <a:r>
+              <a:rPr kumimoji="1" lang="ja-JP" altLang="en-US" sz="3200" b="1" u="sng" dirty="0"/>
+              <a:t>アクションゲーム制作体験</a:t>
+            </a:r>
+            <a:endParaRPr kumimoji="1" lang="en-US" altLang="ja-JP" sz="3200" b="1" u="sng" dirty="0"/>
+          </a:p>
+        </p:txBody>
+      </p:sp>
+      <p:sp>
+        <p:nvSpPr>
+          <p:cNvPr id="6" name="テキスト ボックス 5">
+            <a:extLst>
+              <a:ext uri="{FF2B5EF4-FFF2-40B4-BE49-F238E27FC236}">
+                <a16:creationId xmlns:a16="http://schemas.microsoft.com/office/drawing/2014/main" id="{55830AD6-028B-4C4E-80BF-B70DFC1C3A46}"/>
+              </a:ext>
+            </a:extLst>
+          </p:cNvPr>
+          <p:cNvSpPr txBox="1"/>
+          <p:nvPr/>
+        </p:nvSpPr>
+        <p:spPr>
+          <a:xfrm>
+            <a:off x="567542" y="1216429"/>
+            <a:ext cx="8281434" cy="461665"/>
           </a:xfrm>
           <a:prstGeom prst="rect">
             <a:avLst/>
@@ -6029,17 +7532,10 @@
             </a:r>
             <a:r>
               <a:rPr lang="ja-JP" altLang="en-US" sz="2400" dirty="0"/>
-              <a:t>は</a:t>
+              <a:t>はなんと。。</a:t>
             </a:r>
             <a:endParaRPr lang="en-US" altLang="ja-JP" sz="2400" dirty="0"/>
           </a:p>
-          <a:p>
-            <a:r>
-              <a:rPr lang="ja-JP" altLang="en-US" sz="2400" dirty="0"/>
-              <a:t>なんと。。</a:t>
-            </a:r>
-            <a:endParaRPr lang="en-US" altLang="ja-JP" sz="2400" dirty="0"/>
-          </a:p>
         </p:txBody>
       </p:sp>
       <p:sp>
@@ -6056,7 +7552,7 @@
         </p:nvSpPr>
         <p:spPr>
           <a:xfrm>
-            <a:off x="2167468" y="1614993"/>
+            <a:off x="567542" y="1678094"/>
             <a:ext cx="5841999" cy="3439606"/>
           </a:xfrm>
           <a:prstGeom prst="irregularSeal1">
@@ -6109,7 +7605,7 @@
         </p:nvSpPr>
         <p:spPr>
           <a:xfrm>
-            <a:off x="7928160" y="4484563"/>
+            <a:off x="6409541" y="4718241"/>
             <a:ext cx="1415772" cy="461665"/>
           </a:xfrm>
           <a:prstGeom prst="rect">
@@ -6146,7 +7642,7 @@
         <p:spPr>
           <a:xfrm>
             <a:off x="567542" y="5455889"/>
-            <a:ext cx="6647974" cy="830997"/>
+            <a:ext cx="7571303" cy="830997"/>
           </a:xfrm>
           <a:prstGeom prst="rect">
             <a:avLst/>
@@ -6168,7 +7664,7 @@
           <a:p>
             <a:r>
               <a:rPr lang="ja-JP" altLang="en-US" sz="2400" dirty="0"/>
-              <a:t>今のうちからゲーム制作を体験しましょう！！</a:t>
+              <a:t>すぐにでも本格的なゲーム制作を体験しましょう！！</a:t>
             </a:r>
             <a:endParaRPr lang="en-US" altLang="ja-JP" sz="2400" dirty="0"/>
           </a:p>
@@ -6278,7 +7774,7 @@
             </a:r>
             <a:r>
               <a:rPr kumimoji="1" lang="ja-JP" altLang="en-US" sz="2400" dirty="0"/>
-              <a:t>を起動しますが、</a:t>
+              <a:t>を起動したいですが、</a:t>
             </a:r>
             <a:endParaRPr kumimoji="1" lang="en-US" altLang="ja-JP" sz="2400" dirty="0"/>
           </a:p>
@@ -6300,6 +7796,261 @@
               <a:t>から起動します。</a:t>
             </a:r>
             <a:endParaRPr lang="en-US" altLang="ja-JP" sz="2400" dirty="0"/>
+          </a:p>
+        </p:txBody>
+      </p:sp>
+      <p:pic>
+        <p:nvPicPr>
+          <p:cNvPr id="7" name="図 6">
+            <a:extLst>
+              <a:ext uri="{FF2B5EF4-FFF2-40B4-BE49-F238E27FC236}">
+                <a16:creationId xmlns:a16="http://schemas.microsoft.com/office/drawing/2014/main" id="{64F33BE2-9103-4B8F-A85D-19DE4DE89AA9}"/>
+              </a:ext>
+            </a:extLst>
+          </p:cNvPr>
+          <p:cNvPicPr>
+            <a:picLocks noChangeAspect="1"/>
+          </p:cNvPicPr>
+          <p:nvPr/>
+        </p:nvPicPr>
+        <p:blipFill>
+          <a:blip r:embed="rId2"/>
+          <a:stretch>
+            <a:fillRect/>
+          </a:stretch>
+        </p:blipFill>
+        <p:spPr>
+          <a:xfrm>
+            <a:off x="567542" y="2358914"/>
+            <a:ext cx="1247949" cy="1581371"/>
+          </a:xfrm>
+          <a:prstGeom prst="rect">
+            <a:avLst/>
+          </a:prstGeom>
+        </p:spPr>
+      </p:pic>
+      <p:pic>
+        <p:nvPicPr>
+          <p:cNvPr id="11" name="図 10">
+            <a:extLst>
+              <a:ext uri="{FF2B5EF4-FFF2-40B4-BE49-F238E27FC236}">
+                <a16:creationId xmlns:a16="http://schemas.microsoft.com/office/drawing/2014/main" id="{1443587E-1AC0-4958-B21B-274044360434}"/>
+              </a:ext>
+            </a:extLst>
+          </p:cNvPr>
+          <p:cNvPicPr>
+            <a:picLocks noChangeAspect="1"/>
+          </p:cNvPicPr>
+          <p:nvPr/>
+        </p:nvPicPr>
+        <p:blipFill>
+          <a:blip r:embed="rId3"/>
+          <a:stretch>
+            <a:fillRect/>
+          </a:stretch>
+        </p:blipFill>
+        <p:spPr>
+          <a:xfrm>
+            <a:off x="3579153" y="2358914"/>
+            <a:ext cx="1867161" cy="1295581"/>
+          </a:xfrm>
+          <a:prstGeom prst="rect">
+            <a:avLst/>
+          </a:prstGeom>
+        </p:spPr>
+      </p:pic>
+      <p:pic>
+        <p:nvPicPr>
+          <p:cNvPr id="13" name="図 12">
+            <a:extLst>
+              <a:ext uri="{FF2B5EF4-FFF2-40B4-BE49-F238E27FC236}">
+                <a16:creationId xmlns:a16="http://schemas.microsoft.com/office/drawing/2014/main" id="{9A374897-91F8-4717-8C5E-9E895A677FA1}"/>
+              </a:ext>
+            </a:extLst>
+          </p:cNvPr>
+          <p:cNvPicPr>
+            <a:picLocks noChangeAspect="1"/>
+          </p:cNvPicPr>
+          <p:nvPr/>
+        </p:nvPicPr>
+        <p:blipFill>
+          <a:blip r:embed="rId4"/>
+          <a:stretch>
+            <a:fillRect/>
+          </a:stretch>
+        </p:blipFill>
+        <p:spPr>
+          <a:xfrm>
+            <a:off x="7136191" y="2364514"/>
+            <a:ext cx="2010056" cy="3277057"/>
+          </a:xfrm>
+          <a:prstGeom prst="rect">
+            <a:avLst/>
+          </a:prstGeom>
+        </p:spPr>
+      </p:pic>
+      <p:sp>
+        <p:nvSpPr>
+          <p:cNvPr id="14" name="矢印: 右 13">
+            <a:extLst>
+              <a:ext uri="{FF2B5EF4-FFF2-40B4-BE49-F238E27FC236}">
+                <a16:creationId xmlns:a16="http://schemas.microsoft.com/office/drawing/2014/main" id="{882D5C5F-0D91-42AE-A65B-563F82AD7AC1}"/>
+              </a:ext>
+            </a:extLst>
+          </p:cNvPr>
+          <p:cNvSpPr/>
+          <p:nvPr/>
+        </p:nvSpPr>
+        <p:spPr>
+          <a:xfrm>
+            <a:off x="2033378" y="2734733"/>
+            <a:ext cx="1327890" cy="524934"/>
+          </a:xfrm>
+          <a:prstGeom prst="rightArrow">
+            <a:avLst/>
+          </a:prstGeom>
+          <a:solidFill>
+            <a:srgbClr val="FF0000"/>
+          </a:solidFill>
+          <a:ln>
+            <a:solidFill>
+              <a:schemeClr val="tx1"/>
+            </a:solidFill>
+          </a:ln>
+        </p:spPr>
+        <p:style>
+          <a:lnRef idx="2">
+            <a:schemeClr val="accent1">
+              <a:shade val="50000"/>
+            </a:schemeClr>
+          </a:lnRef>
+          <a:fillRef idx="1">
+            <a:schemeClr val="accent1"/>
+          </a:fillRef>
+          <a:effectRef idx="0">
+            <a:schemeClr val="accent1"/>
+          </a:effectRef>
+          <a:fontRef idx="minor">
+            <a:schemeClr val="lt1"/>
+          </a:fontRef>
+        </p:style>
+        <p:txBody>
+          <a:bodyPr rtlCol="0" anchor="ctr"/>
+          <a:lstStyle/>
+          <a:p>
+            <a:pPr algn="ctr"/>
+            <a:endParaRPr kumimoji="1" lang="ja-JP" altLang="en-US"/>
+          </a:p>
+        </p:txBody>
+      </p:sp>
+      <p:sp>
+        <p:nvSpPr>
+          <p:cNvPr id="15" name="矢印: 右 14">
+            <a:extLst>
+              <a:ext uri="{FF2B5EF4-FFF2-40B4-BE49-F238E27FC236}">
+                <a16:creationId xmlns:a16="http://schemas.microsoft.com/office/drawing/2014/main" id="{C0DD3849-656D-4893-9070-B0B9F458848E}"/>
+              </a:ext>
+            </a:extLst>
+          </p:cNvPr>
+          <p:cNvSpPr/>
+          <p:nvPr/>
+        </p:nvSpPr>
+        <p:spPr>
+          <a:xfrm>
+            <a:off x="5676633" y="2744237"/>
+            <a:ext cx="1327890" cy="524934"/>
+          </a:xfrm>
+          <a:prstGeom prst="rightArrow">
+            <a:avLst/>
+          </a:prstGeom>
+          <a:solidFill>
+            <a:srgbClr val="FF0000"/>
+          </a:solidFill>
+          <a:ln>
+            <a:solidFill>
+              <a:schemeClr val="tx1"/>
+            </a:solidFill>
+          </a:ln>
+        </p:spPr>
+        <p:style>
+          <a:lnRef idx="2">
+            <a:schemeClr val="accent1">
+              <a:shade val="50000"/>
+            </a:schemeClr>
+          </a:lnRef>
+          <a:fillRef idx="1">
+            <a:schemeClr val="accent1"/>
+          </a:fillRef>
+          <a:effectRef idx="0">
+            <a:schemeClr val="accent1"/>
+          </a:effectRef>
+          <a:fontRef idx="minor">
+            <a:schemeClr val="lt1"/>
+          </a:fontRef>
+        </p:style>
+        <p:txBody>
+          <a:bodyPr rtlCol="0" anchor="ctr"/>
+          <a:lstStyle/>
+          <a:p>
+            <a:pPr algn="ctr"/>
+            <a:endParaRPr kumimoji="1" lang="ja-JP" altLang="en-US"/>
+          </a:p>
+        </p:txBody>
+      </p:sp>
+      <p:sp>
+        <p:nvSpPr>
+          <p:cNvPr id="16" name="吹き出し: 四角形 15">
+            <a:extLst>
+              <a:ext uri="{FF2B5EF4-FFF2-40B4-BE49-F238E27FC236}">
+                <a16:creationId xmlns:a16="http://schemas.microsoft.com/office/drawing/2014/main" id="{C2C699CD-3EC7-4FA4-B6B8-F809AC0EA476}"/>
+              </a:ext>
+            </a:extLst>
+          </p:cNvPr>
+          <p:cNvSpPr/>
+          <p:nvPr/>
+        </p:nvSpPr>
+        <p:spPr>
+          <a:xfrm>
+            <a:off x="7228981" y="4487334"/>
+            <a:ext cx="2389152" cy="431799"/>
+          </a:xfrm>
+          <a:prstGeom prst="wedgeRectCallout">
+            <a:avLst>
+              <a:gd name="adj1" fmla="val -30047"/>
+              <a:gd name="adj2" fmla="val 101716"/>
+            </a:avLst>
+          </a:prstGeom>
+          <a:ln/>
+        </p:spPr>
+        <p:style>
+          <a:lnRef idx="2">
+            <a:schemeClr val="accent5">
+              <a:shade val="50000"/>
+            </a:schemeClr>
+          </a:lnRef>
+          <a:fillRef idx="1">
+            <a:schemeClr val="accent5"/>
+          </a:fillRef>
+          <a:effectRef idx="0">
+            <a:schemeClr val="accent5"/>
+          </a:effectRef>
+          <a:fontRef idx="minor">
+            <a:schemeClr val="lt1"/>
+          </a:fontRef>
+        </p:style>
+        <p:txBody>
+          <a:bodyPr rtlCol="0" anchor="ctr"/>
+          <a:lstStyle/>
+          <a:p>
+            <a:pPr algn="ctr"/>
+            <a:r>
+              <a:rPr kumimoji="1" lang="ja-JP" altLang="en-US" b="1" dirty="0">
+                <a:solidFill>
+                  <a:schemeClr val="bg1"/>
+                </a:solidFill>
+              </a:rPr>
+              <a:t>ダブルクリック</a:t>
+            </a:r>
           </a:p>
         </p:txBody>
       </p:sp>
@@ -6421,6 +8172,90 @@
           </a:p>
         </p:txBody>
       </p:sp>
+      <p:pic>
+        <p:nvPicPr>
+          <p:cNvPr id="3" name="図 2">
+            <a:extLst>
+              <a:ext uri="{FF2B5EF4-FFF2-40B4-BE49-F238E27FC236}">
+                <a16:creationId xmlns:a16="http://schemas.microsoft.com/office/drawing/2014/main" id="{F9C05B40-3254-4D9C-B8D4-93580358AC72}"/>
+              </a:ext>
+            </a:extLst>
+          </p:cNvPr>
+          <p:cNvPicPr>
+            <a:picLocks noChangeAspect="1"/>
+          </p:cNvPicPr>
+          <p:nvPr/>
+        </p:nvPicPr>
+        <p:blipFill>
+          <a:blip r:embed="rId2"/>
+          <a:stretch>
+            <a:fillRect/>
+          </a:stretch>
+        </p:blipFill>
+        <p:spPr>
+          <a:xfrm>
+            <a:off x="567542" y="1817793"/>
+            <a:ext cx="9674474" cy="2508673"/>
+          </a:xfrm>
+          <a:prstGeom prst="rect">
+            <a:avLst/>
+          </a:prstGeom>
+        </p:spPr>
+      </p:pic>
+      <p:sp>
+        <p:nvSpPr>
+          <p:cNvPr id="7" name="矢印: 右 6">
+            <a:extLst>
+              <a:ext uri="{FF2B5EF4-FFF2-40B4-BE49-F238E27FC236}">
+                <a16:creationId xmlns:a16="http://schemas.microsoft.com/office/drawing/2014/main" id="{2945116F-CBEE-464E-90D7-7B19CB11DB87}"/>
+              </a:ext>
+            </a:extLst>
+          </p:cNvPr>
+          <p:cNvSpPr/>
+          <p:nvPr/>
+        </p:nvSpPr>
+        <p:spPr>
+          <a:xfrm rot="18234661">
+            <a:off x="7495163" y="2569524"/>
+            <a:ext cx="776827" cy="524934"/>
+          </a:xfrm>
+          <a:prstGeom prst="rightArrow">
+            <a:avLst/>
+          </a:prstGeom>
+          <a:solidFill>
+            <a:srgbClr val="FF0000"/>
+          </a:solidFill>
+          <a:ln>
+            <a:solidFill>
+              <a:schemeClr val="tx1"/>
+            </a:solidFill>
+          </a:ln>
+        </p:spPr>
+        <p:style>
+          <a:lnRef idx="2">
+            <a:schemeClr val="accent1">
+              <a:shade val="50000"/>
+            </a:schemeClr>
+          </a:lnRef>
+          <a:fillRef idx="1">
+            <a:schemeClr val="accent1"/>
+          </a:fillRef>
+          <a:effectRef idx="0">
+            <a:schemeClr val="accent1"/>
+          </a:effectRef>
+          <a:fontRef idx="minor">
+            <a:schemeClr val="lt1"/>
+          </a:fontRef>
+        </p:style>
+        <p:txBody>
+          <a:bodyPr rtlCol="0" anchor="ctr"/>
+          <a:lstStyle/>
+          <a:p>
+            <a:pPr algn="ctr"/>
+            <a:endParaRPr kumimoji="1" lang="ja-JP" altLang="en-US"/>
+          </a:p>
+        </p:txBody>
+      </p:sp>
     </p:spTree>
     <p:extLst>
       <p:ext uri="{BB962C8B-B14F-4D97-AF65-F5344CB8AC3E}">
@@ -6942,6 +8777,36 @@
           </a:p>
         </p:txBody>
       </p:sp>
+      <p:pic>
+        <p:nvPicPr>
+          <p:cNvPr id="5" name="図 4">
+            <a:extLst>
+              <a:ext uri="{FF2B5EF4-FFF2-40B4-BE49-F238E27FC236}">
+                <a16:creationId xmlns:a16="http://schemas.microsoft.com/office/drawing/2014/main" id="{1D56BB74-ED49-4F07-84E8-2BEF90E5C815}"/>
+              </a:ext>
+            </a:extLst>
+          </p:cNvPr>
+          <p:cNvPicPr>
+            <a:picLocks noChangeAspect="1"/>
+          </p:cNvPicPr>
+          <p:nvPr/>
+        </p:nvPicPr>
+        <p:blipFill>
+          <a:blip r:embed="rId2"/>
+          <a:stretch>
+            <a:fillRect/>
+          </a:stretch>
+        </p:blipFill>
+        <p:spPr>
+          <a:xfrm>
+            <a:off x="567542" y="2187126"/>
+            <a:ext cx="4987744" cy="4178920"/>
+          </a:xfrm>
+          <a:prstGeom prst="rect">
+            <a:avLst/>
+          </a:prstGeom>
+        </p:spPr>
+      </p:pic>
     </p:spTree>
     <p:extLst>
       <p:ext uri="{BB962C8B-B14F-4D97-AF65-F5344CB8AC3E}">
@@ -7098,6 +8963,36 @@
           </a:p>
         </p:txBody>
       </p:sp>
+      <p:pic>
+        <p:nvPicPr>
+          <p:cNvPr id="7" name="図 6">
+            <a:extLst>
+              <a:ext uri="{FF2B5EF4-FFF2-40B4-BE49-F238E27FC236}">
+                <a16:creationId xmlns:a16="http://schemas.microsoft.com/office/drawing/2014/main" id="{00DDFA51-5B28-4286-8E37-E053F7F96745}"/>
+              </a:ext>
+            </a:extLst>
+          </p:cNvPr>
+          <p:cNvPicPr>
+            <a:picLocks noChangeAspect="1"/>
+          </p:cNvPicPr>
+          <p:nvPr/>
+        </p:nvPicPr>
+        <p:blipFill>
+          <a:blip r:embed="rId2"/>
+          <a:stretch>
+            <a:fillRect/>
+          </a:stretch>
+        </p:blipFill>
+        <p:spPr>
+          <a:xfrm>
+            <a:off x="567542" y="2556458"/>
+            <a:ext cx="7382658" cy="3998940"/>
+          </a:xfrm>
+          <a:prstGeom prst="rect">
+            <a:avLst/>
+          </a:prstGeom>
+        </p:spPr>
+      </p:pic>
     </p:spTree>
     <p:extLst>
       <p:ext uri="{BB962C8B-B14F-4D97-AF65-F5344CB8AC3E}">
